--- a/Health-a-thon 2026 - Two-Page Overview (Binary Minds).pptx
+++ b/Health-a-thon 2026 - Two-Page Overview (Binary Minds).pptx
@@ -6060,7 +6060,7 @@
         <p:spPr>
           <a:xfrm>
             <a:off x="6382512" y="5605272"/>
-            <a:ext cx="5166360" cy="201168"/>
+            <a:ext cx="5166360" cy="571500"/>
           </a:xfrm>
           <a:prstGeom prst="rect">
             <a:avLst/>
@@ -6073,22 +6073,42 @@
           </a:bodyPr>
           <a:lstStyle/>
           <a:p>
-            <a:pPr algn="l">
-              <a:spcBef>
-                <a:spcPts val="0"/>
-              </a:spcBef>
-              <a:spcAft>
-                <a:spcPts val="300"/>
-              </a:spcAft>
+            <a:pPr>
+              <a:defRPr sz="950">
+                <a:solidFill>
+                  <a:srgbClr val="334155"/>
+                </a:solidFill>
+                <a:latin typeface="Calibri"/>
+              </a:defRPr>
             </a:pPr>
             <a:r>
-              <a:rPr sz="869" b="0" i="0">
+              <a:t>• MVP: https://rounds-ai-umber.vercel.app/</a:t>
+            </a:r>
+          </a:p>
+          <a:p>
+            <a:pPr>
+              <a:defRPr sz="950">
                 <a:solidFill>
                   <a:srgbClr val="334155"/>
                 </a:solidFill>
-                <a:latin typeface="Aptos"/>
-              </a:rPr>
-              <a:t>GitHub repository: https://github.com/santhoshh005/Rounds_AI</a:t>
+                <a:latin typeface="Calibri"/>
+              </a:defRPr>
+            </a:pPr>
+            <a:r>
+              <a:t>• Video Demo Walkthrough: [Insert 2–3 Minute Demo Video URL]</a:t>
+            </a:r>
+          </a:p>
+          <a:p>
+            <a:pPr>
+              <a:defRPr sz="950">
+                <a:solidFill>
+                  <a:srgbClr val="334155"/>
+                </a:solidFill>
+                <a:latin typeface="Calibri"/>
+              </a:defRPr>
+            </a:pPr>
+            <a:r>
+              <a:t>• Other Supporting Links (GitHub): https://github.com/santhoshh005/Rounds_AI</a:t>
             </a:r>
           </a:p>
         </p:txBody>
@@ -6114,19 +6134,7 @@
             <a:spAutoFit/>
           </a:bodyPr>
           <a:lstStyle/>
-          <a:p>
-            <a:pPr algn="l">
-              <a:spcBef>
-                <a:spcPts val="0"/>
-              </a:spcBef>
-              <a:spcAft>
-                <a:spcPts val="300"/>
-              </a:spcAft>
-            </a:pPr>
-            <a:r>
-              <a:t>MVP / deployment: https://rounds-ai-umber.vercel.app/  |  Demo: [Insert 2–3 Minute Demo Video URL]</a:t>
-            </a:r>
-          </a:p>
+          <a:p/>
         </p:txBody>
       </p:sp>
     </p:spTree>

--- a/Health-a-thon 2026 - Two-Page Overview (Binary Minds).pptx
+++ b/Health-a-thon 2026 - Two-Page Overview (Binary Minds).pptx
@@ -5,10 +5,10 @@
     <p:sldMasterId id="2147483648" r:id="rId1"/>
   </p:sldMasterIdLst>
   <p:sldIdLst>
-    <p:sldId id="256" r:id="rId7"/>
-    <p:sldId id="257" r:id="rId8"/>
+    <p:sldId id="256" r:id="rId2"/>
+    <p:sldId id="257" r:id="rId3"/>
   </p:sldIdLst>
-  <p:sldSz cx="12191999" cy="6858000" type="screen4x3"/>
+  <p:sldSz cx="12192000" cy="6858000"/>
   <p:notesSz cx="6858000" cy="9144000"/>
   <p:defaultTextStyle>
     <a:defPPr>
@@ -105,6 +105,22 @@
       </a:defRPr>
     </a:lvl9pPr>
   </p:defaultTextStyle>
+  <p:extLst>
+    <p:ext uri="{EFAFB233-063F-42B5-8137-9DF3F51BA10A}">
+      <p15:sldGuideLst xmlns:p15="http://schemas.microsoft.com/office/powerpoint/2012/main">
+        <p15:guide id="1" orient="horz" pos="2160">
+          <p15:clr>
+            <a:srgbClr val="A4A3A4"/>
+          </p15:clr>
+        </p15:guide>
+        <p15:guide id="2" pos="2880">
+          <p15:clr>
+            <a:srgbClr val="A4A3A4"/>
+          </p15:clr>
+        </p15:guide>
+      </p15:sldGuideLst>
+    </p:ext>
+  </p:extLst>
 </p:presentation>
 </file>
 
@@ -146,10 +162,9 @@
           <a:lstStyle/>
           <a:p>
             <a:r>
-              <a:rPr lang="en-US" smtClean="0"/>
+              <a:rPr lang="en-US"/>
               <a:t>Click to edit Master title style</a:t>
             </a:r>
-            <a:endParaRPr lang="en-US"/>
           </a:p>
         </p:txBody>
       </p:sp>
@@ -265,10 +280,9 @@
           </a:lstStyle>
           <a:p>
             <a:r>
-              <a:rPr lang="en-US" smtClean="0"/>
+              <a:rPr lang="en-US"/>
               <a:t>Click to edit Master subtitle style</a:t>
             </a:r>
-            <a:endParaRPr lang="en-US"/>
           </a:p>
         </p:txBody>
       </p:sp>
@@ -289,7 +303,7 @@
           <a:p>
             <a:fld id="{5BCAD085-E8A6-8845-BD4E-CB4CCA059FC4}" type="datetimeFigureOut">
               <a:rPr lang="en-US" smtClean="0"/>
-              <a:t>1/27/13</a:t>
+              <a:t>10/27/2026</a:t>
             </a:fld>
             <a:endParaRPr lang="en-US"/>
           </a:p>
@@ -383,10 +397,9 @@
           <a:lstStyle/>
           <a:p>
             <a:r>
-              <a:rPr lang="en-US" smtClean="0"/>
+              <a:rPr lang="en-US"/>
               <a:t>Click to edit Master title style</a:t>
             </a:r>
-            <a:endParaRPr lang="en-US"/>
           </a:p>
         </p:txBody>
       </p:sp>
@@ -407,38 +420,37 @@
           <a:p>
             <a:pPr lvl="0"/>
             <a:r>
-              <a:rPr lang="en-US" smtClean="0"/>
+              <a:rPr lang="en-US"/>
               <a:t>Click to edit Master text styles</a:t>
             </a:r>
           </a:p>
           <a:p>
             <a:pPr lvl="1"/>
             <a:r>
-              <a:rPr lang="en-US" smtClean="0"/>
+              <a:rPr lang="en-US"/>
               <a:t>Second level</a:t>
             </a:r>
           </a:p>
           <a:p>
             <a:pPr lvl="2"/>
             <a:r>
-              <a:rPr lang="en-US" smtClean="0"/>
+              <a:rPr lang="en-US"/>
               <a:t>Third level</a:t>
             </a:r>
           </a:p>
           <a:p>
             <a:pPr lvl="3"/>
             <a:r>
-              <a:rPr lang="en-US" smtClean="0"/>
+              <a:rPr lang="en-US"/>
               <a:t>Fourth level</a:t>
             </a:r>
           </a:p>
           <a:p>
             <a:pPr lvl="4"/>
             <a:r>
-              <a:rPr lang="en-US" smtClean="0"/>
+              <a:rPr lang="en-US"/>
               <a:t>Fifth level</a:t>
             </a:r>
-            <a:endParaRPr lang="en-US"/>
           </a:p>
         </p:txBody>
       </p:sp>
@@ -459,7 +471,7 @@
           <a:p>
             <a:fld id="{5BCAD085-E8A6-8845-BD4E-CB4CCA059FC4}" type="datetimeFigureOut">
               <a:rPr lang="en-US" smtClean="0"/>
-              <a:t>1/27/13</a:t>
+              <a:t>10/27/2026</a:t>
             </a:fld>
             <a:endParaRPr lang="en-US"/>
           </a:p>
@@ -558,10 +570,9 @@
           <a:lstStyle/>
           <a:p>
             <a:r>
-              <a:rPr lang="en-US" smtClean="0"/>
+              <a:rPr lang="en-US"/>
               <a:t>Click to edit Master title style</a:t>
             </a:r>
-            <a:endParaRPr lang="en-US"/>
           </a:p>
         </p:txBody>
       </p:sp>
@@ -587,38 +598,37 @@
           <a:p>
             <a:pPr lvl="0"/>
             <a:r>
-              <a:rPr lang="en-US" smtClean="0"/>
+              <a:rPr lang="en-US"/>
               <a:t>Click to edit Master text styles</a:t>
             </a:r>
           </a:p>
           <a:p>
             <a:pPr lvl="1"/>
             <a:r>
-              <a:rPr lang="en-US" smtClean="0"/>
+              <a:rPr lang="en-US"/>
               <a:t>Second level</a:t>
             </a:r>
           </a:p>
           <a:p>
             <a:pPr lvl="2"/>
             <a:r>
-              <a:rPr lang="en-US" smtClean="0"/>
+              <a:rPr lang="en-US"/>
               <a:t>Third level</a:t>
             </a:r>
           </a:p>
           <a:p>
             <a:pPr lvl="3"/>
             <a:r>
-              <a:rPr lang="en-US" smtClean="0"/>
+              <a:rPr lang="en-US"/>
               <a:t>Fourth level</a:t>
             </a:r>
           </a:p>
           <a:p>
             <a:pPr lvl="4"/>
             <a:r>
-              <a:rPr lang="en-US" smtClean="0"/>
+              <a:rPr lang="en-US"/>
               <a:t>Fifth level</a:t>
             </a:r>
-            <a:endParaRPr lang="en-US"/>
           </a:p>
         </p:txBody>
       </p:sp>
@@ -639,7 +649,7 @@
           <a:p>
             <a:fld id="{5BCAD085-E8A6-8845-BD4E-CB4CCA059FC4}" type="datetimeFigureOut">
               <a:rPr lang="en-US" smtClean="0"/>
-              <a:t>1/27/13</a:t>
+              <a:t>10/27/2026</a:t>
             </a:fld>
             <a:endParaRPr lang="en-US"/>
           </a:p>
@@ -733,10 +743,9 @@
           <a:lstStyle/>
           <a:p>
             <a:r>
-              <a:rPr lang="en-US" smtClean="0"/>
+              <a:rPr lang="en-US"/>
               <a:t>Click to edit Master title style</a:t>
             </a:r>
-            <a:endParaRPr lang="en-US"/>
           </a:p>
         </p:txBody>
       </p:sp>
@@ -757,38 +766,37 @@
           <a:p>
             <a:pPr lvl="0"/>
             <a:r>
-              <a:rPr lang="en-US" smtClean="0"/>
+              <a:rPr lang="en-US"/>
               <a:t>Click to edit Master text styles</a:t>
             </a:r>
           </a:p>
           <a:p>
             <a:pPr lvl="1"/>
             <a:r>
-              <a:rPr lang="en-US" smtClean="0"/>
+              <a:rPr lang="en-US"/>
               <a:t>Second level</a:t>
             </a:r>
           </a:p>
           <a:p>
             <a:pPr lvl="2"/>
             <a:r>
-              <a:rPr lang="en-US" smtClean="0"/>
+              <a:rPr lang="en-US"/>
               <a:t>Third level</a:t>
             </a:r>
           </a:p>
           <a:p>
             <a:pPr lvl="3"/>
             <a:r>
-              <a:rPr lang="en-US" smtClean="0"/>
+              <a:rPr lang="en-US"/>
               <a:t>Fourth level</a:t>
             </a:r>
           </a:p>
           <a:p>
             <a:pPr lvl="4"/>
             <a:r>
-              <a:rPr lang="en-US" smtClean="0"/>
+              <a:rPr lang="en-US"/>
               <a:t>Fifth level</a:t>
             </a:r>
-            <a:endParaRPr lang="en-US"/>
           </a:p>
         </p:txBody>
       </p:sp>
@@ -809,7 +817,7 @@
           <a:p>
             <a:fld id="{5BCAD085-E8A6-8845-BD4E-CB4CCA059FC4}" type="datetimeFigureOut">
               <a:rPr lang="en-US" smtClean="0"/>
-              <a:t>1/27/13</a:t>
+              <a:t>10/27/2026</a:t>
             </a:fld>
             <a:endParaRPr lang="en-US"/>
           </a:p>
@@ -912,10 +920,9 @@
           </a:lstStyle>
           <a:p>
             <a:r>
-              <a:rPr lang="en-US" smtClean="0"/>
+              <a:rPr lang="en-US"/>
               <a:t>Click to edit Master title style</a:t>
             </a:r>
-            <a:endParaRPr lang="en-US"/>
           </a:p>
         </p:txBody>
       </p:sp>
@@ -1032,7 +1039,7 @@
           <a:p>
             <a:pPr lvl="0"/>
             <a:r>
-              <a:rPr lang="en-US" smtClean="0"/>
+              <a:rPr lang="en-US"/>
               <a:t>Click to edit Master text styles</a:t>
             </a:r>
           </a:p>
@@ -1055,7 +1062,7 @@
           <a:p>
             <a:fld id="{5BCAD085-E8A6-8845-BD4E-CB4CCA059FC4}" type="datetimeFigureOut">
               <a:rPr lang="en-US" smtClean="0"/>
-              <a:t>1/27/13</a:t>
+              <a:t>10/27/2026</a:t>
             </a:fld>
             <a:endParaRPr lang="en-US"/>
           </a:p>
@@ -1149,10 +1156,9 @@
           <a:lstStyle/>
           <a:p>
             <a:r>
-              <a:rPr lang="en-US" smtClean="0"/>
+              <a:rPr lang="en-US"/>
               <a:t>Click to edit Master title style</a:t>
             </a:r>
-            <a:endParaRPr lang="en-US"/>
           </a:p>
         </p:txBody>
       </p:sp>
@@ -1206,38 +1212,37 @@
           <a:p>
             <a:pPr lvl="0"/>
             <a:r>
-              <a:rPr lang="en-US" smtClean="0"/>
+              <a:rPr lang="en-US"/>
               <a:t>Click to edit Master text styles</a:t>
             </a:r>
           </a:p>
           <a:p>
             <a:pPr lvl="1"/>
             <a:r>
-              <a:rPr lang="en-US" smtClean="0"/>
+              <a:rPr lang="en-US"/>
               <a:t>Second level</a:t>
             </a:r>
           </a:p>
           <a:p>
             <a:pPr lvl="2"/>
             <a:r>
-              <a:rPr lang="en-US" smtClean="0"/>
+              <a:rPr lang="en-US"/>
               <a:t>Third level</a:t>
             </a:r>
           </a:p>
           <a:p>
             <a:pPr lvl="3"/>
             <a:r>
-              <a:rPr lang="en-US" smtClean="0"/>
+              <a:rPr lang="en-US"/>
               <a:t>Fourth level</a:t>
             </a:r>
           </a:p>
           <a:p>
             <a:pPr lvl="4"/>
             <a:r>
-              <a:rPr lang="en-US" smtClean="0"/>
+              <a:rPr lang="en-US"/>
               <a:t>Fifth level</a:t>
             </a:r>
-            <a:endParaRPr lang="en-US"/>
           </a:p>
         </p:txBody>
       </p:sp>
@@ -1291,38 +1296,37 @@
           <a:p>
             <a:pPr lvl="0"/>
             <a:r>
-              <a:rPr lang="en-US" smtClean="0"/>
+              <a:rPr lang="en-US"/>
               <a:t>Click to edit Master text styles</a:t>
             </a:r>
           </a:p>
           <a:p>
             <a:pPr lvl="1"/>
             <a:r>
-              <a:rPr lang="en-US" smtClean="0"/>
+              <a:rPr lang="en-US"/>
               <a:t>Second level</a:t>
             </a:r>
           </a:p>
           <a:p>
             <a:pPr lvl="2"/>
             <a:r>
-              <a:rPr lang="en-US" smtClean="0"/>
+              <a:rPr lang="en-US"/>
               <a:t>Third level</a:t>
             </a:r>
           </a:p>
           <a:p>
             <a:pPr lvl="3"/>
             <a:r>
-              <a:rPr lang="en-US" smtClean="0"/>
+              <a:rPr lang="en-US"/>
               <a:t>Fourth level</a:t>
             </a:r>
           </a:p>
           <a:p>
             <a:pPr lvl="4"/>
             <a:r>
-              <a:rPr lang="en-US" smtClean="0"/>
+              <a:rPr lang="en-US"/>
               <a:t>Fifth level</a:t>
             </a:r>
-            <a:endParaRPr lang="en-US"/>
           </a:p>
         </p:txBody>
       </p:sp>
@@ -1343,7 +1347,7 @@
           <a:p>
             <a:fld id="{5BCAD085-E8A6-8845-BD4E-CB4CCA059FC4}" type="datetimeFigureOut">
               <a:rPr lang="en-US" smtClean="0"/>
-              <a:t>1/27/13</a:t>
+              <a:t>10/27/2026</a:t>
             </a:fld>
             <a:endParaRPr lang="en-US"/>
           </a:p>
@@ -1441,10 +1445,9 @@
           </a:lstStyle>
           <a:p>
             <a:r>
-              <a:rPr lang="en-US" smtClean="0"/>
+              <a:rPr lang="en-US"/>
               <a:t>Click to edit Master title style</a:t>
             </a:r>
-            <a:endParaRPr lang="en-US"/>
           </a:p>
         </p:txBody>
       </p:sp>
@@ -1507,7 +1510,7 @@
           <a:p>
             <a:pPr lvl="0"/>
             <a:r>
-              <a:rPr lang="en-US" smtClean="0"/>
+              <a:rPr lang="en-US"/>
               <a:t>Click to edit Master text styles</a:t>
             </a:r>
           </a:p>
@@ -1563,38 +1566,37 @@
           <a:p>
             <a:pPr lvl="0"/>
             <a:r>
-              <a:rPr lang="en-US" smtClean="0"/>
+              <a:rPr lang="en-US"/>
               <a:t>Click to edit Master text styles</a:t>
             </a:r>
           </a:p>
           <a:p>
             <a:pPr lvl="1"/>
             <a:r>
-              <a:rPr lang="en-US" smtClean="0"/>
+              <a:rPr lang="en-US"/>
               <a:t>Second level</a:t>
             </a:r>
           </a:p>
           <a:p>
             <a:pPr lvl="2"/>
             <a:r>
-              <a:rPr lang="en-US" smtClean="0"/>
+              <a:rPr lang="en-US"/>
               <a:t>Third level</a:t>
             </a:r>
           </a:p>
           <a:p>
             <a:pPr lvl="3"/>
             <a:r>
-              <a:rPr lang="en-US" smtClean="0"/>
+              <a:rPr lang="en-US"/>
               <a:t>Fourth level</a:t>
             </a:r>
           </a:p>
           <a:p>
             <a:pPr lvl="4"/>
             <a:r>
-              <a:rPr lang="en-US" smtClean="0"/>
+              <a:rPr lang="en-US"/>
               <a:t>Fifth level</a:t>
             </a:r>
-            <a:endParaRPr lang="en-US"/>
           </a:p>
         </p:txBody>
       </p:sp>
@@ -1657,7 +1659,7 @@
           <a:p>
             <a:pPr lvl="0"/>
             <a:r>
-              <a:rPr lang="en-US" smtClean="0"/>
+              <a:rPr lang="en-US"/>
               <a:t>Click to edit Master text styles</a:t>
             </a:r>
           </a:p>
@@ -1713,38 +1715,37 @@
           <a:p>
             <a:pPr lvl="0"/>
             <a:r>
-              <a:rPr lang="en-US" smtClean="0"/>
+              <a:rPr lang="en-US"/>
               <a:t>Click to edit Master text styles</a:t>
             </a:r>
           </a:p>
           <a:p>
             <a:pPr lvl="1"/>
             <a:r>
-              <a:rPr lang="en-US" smtClean="0"/>
+              <a:rPr lang="en-US"/>
               <a:t>Second level</a:t>
             </a:r>
           </a:p>
           <a:p>
             <a:pPr lvl="2"/>
             <a:r>
-              <a:rPr lang="en-US" smtClean="0"/>
+              <a:rPr lang="en-US"/>
               <a:t>Third level</a:t>
             </a:r>
           </a:p>
           <a:p>
             <a:pPr lvl="3"/>
             <a:r>
-              <a:rPr lang="en-US" smtClean="0"/>
+              <a:rPr lang="en-US"/>
               <a:t>Fourth level</a:t>
             </a:r>
           </a:p>
           <a:p>
             <a:pPr lvl="4"/>
             <a:r>
-              <a:rPr lang="en-US" smtClean="0"/>
+              <a:rPr lang="en-US"/>
               <a:t>Fifth level</a:t>
             </a:r>
-            <a:endParaRPr lang="en-US"/>
           </a:p>
         </p:txBody>
       </p:sp>
@@ -1765,7 +1766,7 @@
           <a:p>
             <a:fld id="{5BCAD085-E8A6-8845-BD4E-CB4CCA059FC4}" type="datetimeFigureOut">
               <a:rPr lang="en-US" smtClean="0"/>
-              <a:t>1/27/13</a:t>
+              <a:t>10/27/2026</a:t>
             </a:fld>
             <a:endParaRPr lang="en-US"/>
           </a:p>
@@ -1859,10 +1860,9 @@
           <a:lstStyle/>
           <a:p>
             <a:r>
-              <a:rPr lang="en-US" smtClean="0"/>
+              <a:rPr lang="en-US"/>
               <a:t>Click to edit Master title style</a:t>
             </a:r>
-            <a:endParaRPr lang="en-US"/>
           </a:p>
         </p:txBody>
       </p:sp>
@@ -1883,7 +1883,7 @@
           <a:p>
             <a:fld id="{5BCAD085-E8A6-8845-BD4E-CB4CCA059FC4}" type="datetimeFigureOut">
               <a:rPr lang="en-US" smtClean="0"/>
-              <a:t>1/27/13</a:t>
+              <a:t>10/27/2026</a:t>
             </a:fld>
             <a:endParaRPr lang="en-US"/>
           </a:p>
@@ -1978,7 +1978,7 @@
           <a:p>
             <a:fld id="{5BCAD085-E8A6-8845-BD4E-CB4CCA059FC4}" type="datetimeFigureOut">
               <a:rPr lang="en-US" smtClean="0"/>
-              <a:t>1/27/13</a:t>
+              <a:t>10/27/2026</a:t>
             </a:fld>
             <a:endParaRPr lang="en-US"/>
           </a:p>
@@ -2081,10 +2081,9 @@
           </a:lstStyle>
           <a:p>
             <a:r>
-              <a:rPr lang="en-US" smtClean="0"/>
+              <a:rPr lang="en-US"/>
               <a:t>Click to edit Master title style</a:t>
             </a:r>
-            <a:endParaRPr lang="en-US"/>
           </a:p>
         </p:txBody>
       </p:sp>
@@ -2138,38 +2137,37 @@
           <a:p>
             <a:pPr lvl="0"/>
             <a:r>
-              <a:rPr lang="en-US" smtClean="0"/>
+              <a:rPr lang="en-US"/>
               <a:t>Click to edit Master text styles</a:t>
             </a:r>
           </a:p>
           <a:p>
             <a:pPr lvl="1"/>
             <a:r>
-              <a:rPr lang="en-US" smtClean="0"/>
+              <a:rPr lang="en-US"/>
               <a:t>Second level</a:t>
             </a:r>
           </a:p>
           <a:p>
             <a:pPr lvl="2"/>
             <a:r>
-              <a:rPr lang="en-US" smtClean="0"/>
+              <a:rPr lang="en-US"/>
               <a:t>Third level</a:t>
             </a:r>
           </a:p>
           <a:p>
             <a:pPr lvl="3"/>
             <a:r>
-              <a:rPr lang="en-US" smtClean="0"/>
+              <a:rPr lang="en-US"/>
               <a:t>Fourth level</a:t>
             </a:r>
           </a:p>
           <a:p>
             <a:pPr lvl="4"/>
             <a:r>
-              <a:rPr lang="en-US" smtClean="0"/>
+              <a:rPr lang="en-US"/>
               <a:t>Fifth level</a:t>
             </a:r>
-            <a:endParaRPr lang="en-US"/>
           </a:p>
         </p:txBody>
       </p:sp>
@@ -2232,7 +2230,7 @@
           <a:p>
             <a:pPr lvl="0"/>
             <a:r>
-              <a:rPr lang="en-US" smtClean="0"/>
+              <a:rPr lang="en-US"/>
               <a:t>Click to edit Master text styles</a:t>
             </a:r>
           </a:p>
@@ -2255,7 +2253,7 @@
           <a:p>
             <a:fld id="{5BCAD085-E8A6-8845-BD4E-CB4CCA059FC4}" type="datetimeFigureOut">
               <a:rPr lang="en-US" smtClean="0"/>
-              <a:t>1/27/13</a:t>
+              <a:t>10/27/2026</a:t>
             </a:fld>
             <a:endParaRPr lang="en-US"/>
           </a:p>
@@ -2358,10 +2356,9 @@
           </a:lstStyle>
           <a:p>
             <a:r>
-              <a:rPr lang="en-US" smtClean="0"/>
+              <a:rPr lang="en-US"/>
               <a:t>Click to edit Master title style</a:t>
             </a:r>
-            <a:endParaRPr lang="en-US"/>
           </a:p>
         </p:txBody>
       </p:sp>
@@ -2485,7 +2482,7 @@
           <a:p>
             <a:pPr lvl="0"/>
             <a:r>
-              <a:rPr lang="en-US" smtClean="0"/>
+              <a:rPr lang="en-US"/>
               <a:t>Click to edit Master text styles</a:t>
             </a:r>
           </a:p>
@@ -2508,7 +2505,7 @@
           <a:p>
             <a:fld id="{5BCAD085-E8A6-8845-BD4E-CB4CCA059FC4}" type="datetimeFigureOut">
               <a:rPr lang="en-US" smtClean="0"/>
-              <a:t>1/27/13</a:t>
+              <a:t>10/27/2026</a:t>
             </a:fld>
             <a:endParaRPr lang="en-US"/>
           </a:p>
@@ -2617,10 +2614,9 @@
           <a:lstStyle/>
           <a:p>
             <a:r>
-              <a:rPr lang="en-US" smtClean="0"/>
+              <a:rPr lang="en-US"/>
               <a:t>Click to edit Master title style</a:t>
             </a:r>
-            <a:endParaRPr lang="en-US"/>
           </a:p>
         </p:txBody>
       </p:sp>
@@ -2651,38 +2647,37 @@
           <a:p>
             <a:pPr lvl="0"/>
             <a:r>
-              <a:rPr lang="en-US" smtClean="0"/>
+              <a:rPr lang="en-US"/>
               <a:t>Click to edit Master text styles</a:t>
             </a:r>
           </a:p>
           <a:p>
             <a:pPr lvl="1"/>
             <a:r>
-              <a:rPr lang="en-US" smtClean="0"/>
+              <a:rPr lang="en-US"/>
               <a:t>Second level</a:t>
             </a:r>
           </a:p>
           <a:p>
             <a:pPr lvl="2"/>
             <a:r>
-              <a:rPr lang="en-US" smtClean="0"/>
+              <a:rPr lang="en-US"/>
               <a:t>Third level</a:t>
             </a:r>
           </a:p>
           <a:p>
             <a:pPr lvl="3"/>
             <a:r>
-              <a:rPr lang="en-US" smtClean="0"/>
+              <a:rPr lang="en-US"/>
               <a:t>Fourth level</a:t>
             </a:r>
           </a:p>
           <a:p>
             <a:pPr lvl="4"/>
             <a:r>
-              <a:rPr lang="en-US" smtClean="0"/>
+              <a:rPr lang="en-US"/>
               <a:t>Fifth level</a:t>
             </a:r>
-            <a:endParaRPr lang="en-US"/>
           </a:p>
         </p:txBody>
       </p:sp>
@@ -2721,7 +2716,7 @@
           <a:p>
             <a:fld id="{5BCAD085-E8A6-8845-BD4E-CB4CCA059FC4}" type="datetimeFigureOut">
               <a:rPr lang="en-US" smtClean="0"/>
-              <a:t>1/27/13</a:t>
+              <a:t>10/27/2026</a:t>
             </a:fld>
             <a:endParaRPr lang="en-US"/>
           </a:p>
@@ -3080,7 +3075,7 @@
 </file>
 
 <file path=ppt/slides/slide1.xml><?xml version="1.0" encoding="utf-8"?>
-<p:sld xmlns:a="http://schemas.openxmlformats.org/drawingml/2006/main" xmlns:p="http://schemas.openxmlformats.org/presentationml/2006/main" xmlns:r="http://schemas.openxmlformats.org/officeDocument/2006/relationships">
+<p:sld xmlns:a="http://schemas.openxmlformats.org/drawingml/2006/main" xmlns:r="http://schemas.openxmlformats.org/officeDocument/2006/relationships" xmlns:p="http://schemas.openxmlformats.org/presentationml/2006/main">
   <p:cSld>
     <p:bg>
       <p:bgPr>
@@ -3096,7 +3091,14 @@
         <p:cNvGrpSpPr/>
         <p:nvPr/>
       </p:nvGrpSpPr>
-      <p:grpSpPr/>
+      <p:grpSpPr>
+        <a:xfrm>
+          <a:off x="0" y="0"/>
+          <a:ext cx="0" cy="0"/>
+          <a:chOff x="0" y="0"/>
+          <a:chExt cx="0" cy="0"/>
+        </a:xfrm>
+      </p:grpSpPr>
       <p:sp>
         <p:nvSpPr>
           <p:cNvPr id="2" name="TextBox 1"/>
@@ -3114,7 +3116,7 @@
           <a:noFill/>
         </p:spPr>
         <p:txBody>
-          <a:bodyPr wrap="square" lIns="0" rIns="0" tIns="0" bIns="0" anchor="t">
+          <a:bodyPr wrap="square" lIns="0" tIns="0" rIns="0" bIns="0" anchor="t">
             <a:spAutoFit/>
           </a:bodyPr>
           <a:lstStyle/>
@@ -3156,7 +3158,7 @@
           <a:noFill/>
         </p:spPr>
         <p:txBody>
-          <a:bodyPr wrap="square" lIns="0" rIns="0" tIns="0" bIns="0" anchor="t">
+          <a:bodyPr wrap="square" lIns="0" tIns="0" rIns="0" bIns="0" anchor="t">
             <a:spAutoFit/>
           </a:bodyPr>
           <a:lstStyle/>
@@ -3198,7 +3200,7 @@
           <a:noFill/>
         </p:spPr>
         <p:txBody>
-          <a:bodyPr wrap="square" lIns="0" rIns="0" tIns="0" bIns="0" anchor="t">
+          <a:bodyPr wrap="square" lIns="0" tIns="0" rIns="0" bIns="0" anchor="t">
             <a:spAutoFit/>
           </a:bodyPr>
           <a:lstStyle/>
@@ -3275,7 +3277,7 @@
           <a:noFill/>
         </p:spPr>
         <p:txBody>
-          <a:bodyPr wrap="square" lIns="0" rIns="0" tIns="0" bIns="0" anchor="t">
+          <a:bodyPr wrap="square" lIns="0" tIns="0" rIns="0" bIns="0" anchor="t">
             <a:spAutoFit/>
           </a:bodyPr>
           <a:lstStyle/>
@@ -3342,6 +3344,7 @@
           <a:lstStyle/>
           <a:p>
             <a:pPr algn="ctr"/>
+            <a:endParaRPr/>
           </a:p>
         </p:txBody>
       </p:sp>
@@ -3362,7 +3365,7 @@
           <a:noFill/>
         </p:spPr>
         <p:txBody>
-          <a:bodyPr wrap="square" lIns="0" rIns="0" tIns="0" bIns="0" anchor="t">
+          <a:bodyPr wrap="square" lIns="0" tIns="0" rIns="0" bIns="0" anchor="t">
             <a:spAutoFit/>
           </a:bodyPr>
           <a:lstStyle/>
@@ -3439,7 +3442,161 @@
           <a:noFill/>
         </p:spPr>
         <p:txBody>
-          <a:bodyPr wrap="square" lIns="0" rIns="0" tIns="0" bIns="0" anchor="t">
+          <a:bodyPr wrap="square" lIns="0" tIns="0" rIns="0" bIns="0" anchor="t">
+            <a:spAutoFit/>
+          </a:bodyPr>
+          <a:lstStyle/>
+          <a:p>
+            <a:pPr>
+              <a:defRPr sz="850">
+                <a:solidFill>
+                  <a:srgbClr val="334155"/>
+                </a:solidFill>
+                <a:latin typeface="Calibri"/>
+              </a:defRPr>
+            </a:pPr>
+            <a:r>
+              <a:t>A. Team: Binary Minds (Team Code: 1RKUPH). Chalicheemala Surya Thejas (Team Leader &amp; Technical Lead) and Gaddam Sai Santhosh (AI Systems Engineer) built the local Whisper pipeline, multimodal OCR, CTCAE engine, SSE sync and Next.js 15 workstation.</a:t>
+            </a:r>
+          </a:p>
+        </p:txBody>
+      </p:sp>
+      <p:sp>
+        <p:nvSpPr>
+          <p:cNvPr id="11" name="TextBox 10"/>
+          <p:cNvSpPr txBox="1"/>
+          <p:nvPr/>
+        </p:nvSpPr>
+        <p:spPr>
+          <a:xfrm>
+            <a:off x="640080" y="1938528"/>
+            <a:ext cx="3950208" cy="548640"/>
+          </a:xfrm>
+          <a:prstGeom prst="rect">
+            <a:avLst/>
+          </a:prstGeom>
+          <a:noFill/>
+        </p:spPr>
+        <p:txBody>
+          <a:bodyPr wrap="square" lIns="0" tIns="0" rIns="0" bIns="0" anchor="t">
+            <a:spAutoFit/>
+          </a:bodyPr>
+          <a:lstStyle/>
+          <a:p>
+            <a:pPr>
+              <a:defRPr sz="850">
+                <a:solidFill>
+                  <a:srgbClr val="334155"/>
+                </a:solidFill>
+                <a:latin typeface="Calibri"/>
+              </a:defRPr>
+            </a:pPr>
+            <a:r>
+              <a:t>B. Doctor partner: Dr. Amrut S Kadam (Clinical Lead &amp; Inpatient Ward Attending, Victoria Hospital, Bangalore Medical College &amp; Research Institute - BMCRI). Co-designed workflows, calibrated CTCAE v5.0 thresholds, 120+ drug phonetic rules and febrile-neutropenia sentinels.</a:t>
+            </a:r>
+          </a:p>
+        </p:txBody>
+      </p:sp>
+      <p:sp>
+        <p:nvSpPr>
+          <p:cNvPr id="12" name="TextBox 11"/>
+          <p:cNvSpPr txBox="1"/>
+          <p:nvPr/>
+        </p:nvSpPr>
+        <p:spPr>
+          <a:xfrm>
+            <a:off x="640080" y="2514600"/>
+            <a:ext cx="3950208" cy="548640"/>
+          </a:xfrm>
+          <a:prstGeom prst="rect">
+            <a:avLst/>
+          </a:prstGeom>
+          <a:noFill/>
+        </p:spPr>
+        <p:txBody>
+          <a:bodyPr wrap="square" lIns="0" tIns="0" rIns="0" bIns="0" anchor="t">
+            <a:spAutoFit/>
+          </a:bodyPr>
+          <a:lstStyle/>
+          <a:p>
+            <a:pPr>
+              <a:defRPr sz="850">
+                <a:solidFill>
+                  <a:srgbClr val="334155"/>
+                </a:solidFill>
+                <a:latin typeface="Calibri"/>
+              </a:defRPr>
+            </a:pPr>
+            <a:r>
+              <a:t>Organisation &amp; Track: Victoria Hospital, BMCRI &amp; Binary Minds | Track: Cancer · Doctor / Care Team · Doctor Productivity &amp; Knowledge Assistant.</a:t>
+            </a:r>
+          </a:p>
+        </p:txBody>
+      </p:sp>
+      <p:sp>
+        <p:nvSpPr>
+          <p:cNvPr id="13" name="Rectangle 12"/>
+          <p:cNvSpPr/>
+          <p:nvPr/>
+        </p:nvSpPr>
+        <p:spPr>
+          <a:xfrm>
+            <a:off x="502920" y="3273552"/>
+            <a:ext cx="4224528" cy="2724912"/>
+          </a:xfrm>
+          <a:prstGeom prst="rect">
+            <a:avLst/>
+          </a:prstGeom>
+          <a:solidFill>
+            <a:srgbClr val="FFFFFF"/>
+          </a:solidFill>
+          <a:ln w="11430">
+            <a:solidFill>
+              <a:srgbClr val="CBD5E1"/>
+            </a:solidFill>
+          </a:ln>
+        </p:spPr>
+        <p:style>
+          <a:lnRef idx="1">
+            <a:schemeClr val="accent1"/>
+          </a:lnRef>
+          <a:fillRef idx="3">
+            <a:schemeClr val="accent1"/>
+          </a:fillRef>
+          <a:effectRef idx="2">
+            <a:schemeClr val="accent1"/>
+          </a:effectRef>
+          <a:fontRef idx="minor">
+            <a:schemeClr val="lt1"/>
+          </a:fontRef>
+        </p:style>
+        <p:txBody>
+          <a:bodyPr rtlCol="0" anchor="ctr"/>
+          <a:lstStyle/>
+          <a:p>
+            <a:pPr algn="ctr"/>
+            <a:endParaRPr/>
+          </a:p>
+        </p:txBody>
+      </p:sp>
+      <p:sp>
+        <p:nvSpPr>
+          <p:cNvPr id="14" name="TextBox 13"/>
+          <p:cNvSpPr txBox="1"/>
+          <p:nvPr/>
+        </p:nvSpPr>
+        <p:spPr>
+          <a:xfrm>
+            <a:off x="612648" y="3337560"/>
+            <a:ext cx="4005072" cy="228600"/>
+          </a:xfrm>
+          <a:prstGeom prst="rect">
+            <a:avLst/>
+          </a:prstGeom>
+          <a:noFill/>
+        </p:spPr>
+        <p:txBody>
+          <a:bodyPr wrap="square" lIns="0" tIns="0" rIns="0" bIns="0" anchor="t">
             <a:spAutoFit/>
           </a:bodyPr>
           <a:lstStyle/>
@@ -3453,26 +3610,61 @@
               </a:spcAft>
             </a:pPr>
             <a:r>
-              <a:rPr sz="930" b="0" i="0">
-                <a:solidFill>
-                  <a:srgbClr val="334155"/>
+              <a:rPr sz="1060" b="1" i="0">
+                <a:solidFill>
+                  <a:srgbClr val="1A4599"/>
                 </a:solidFill>
                 <a:latin typeface="Aptos"/>
               </a:rPr>
-              <a:t>A. Team: Binary Minds. Team lead Gaddam Sai Santhosh (Full-Stack AI Systems Engineer) built the local Whisper pipeline, multimodal lab OCR, CTCAE grading engine, SSE live sync and Next.js 15 workstation.</a:t>
-            </a:r>
-          </a:p>
-        </p:txBody>
-      </p:sp>
-      <p:sp>
-        <p:nvSpPr>
-          <p:cNvPr id="11" name="TextBox 10"/>
+              <a:t>Problem Statement (Use Case Specific)</a:t>
+            </a:r>
+          </a:p>
+        </p:txBody>
+      </p:sp>
+      <p:cxnSp>
+        <p:nvCxnSpPr>
+          <p:cNvPr id="15" name="Connector 14"/>
+          <p:cNvCxnSpPr/>
+          <p:nvPr/>
+        </p:nvCxnSpPr>
+        <p:spPr>
+          <a:xfrm>
+            <a:off x="612648" y="3602736"/>
+            <a:ext cx="4005072" cy="0"/>
+          </a:xfrm>
+          <a:prstGeom prst="line">
+            <a:avLst/>
+          </a:prstGeom>
+          <a:ln w="8890">
+            <a:solidFill>
+              <a:srgbClr val="1A4599"/>
+            </a:solidFill>
+          </a:ln>
+        </p:spPr>
+        <p:style>
+          <a:lnRef idx="2">
+            <a:schemeClr val="accent1"/>
+          </a:lnRef>
+          <a:fillRef idx="0">
+            <a:schemeClr val="accent1"/>
+          </a:fillRef>
+          <a:effectRef idx="1">
+            <a:schemeClr val="accent1"/>
+          </a:effectRef>
+          <a:fontRef idx="minor">
+            <a:schemeClr val="tx1"/>
+          </a:fontRef>
+        </p:style>
+      </p:cxnSp>
+      <p:sp>
+        <p:nvSpPr>
+          <p:cNvPr id="16" name="TextBox 15"/>
           <p:cNvSpPr txBox="1"/>
           <p:nvPr/>
         </p:nvSpPr>
         <p:spPr>
           <a:xfrm>
-            <a:off x="640080" y="1938528"/>
+            <a:off x="640080" y="3703320"/>
             <a:ext cx="3950208" cy="548640"/>
           </a:xfrm>
           <a:prstGeom prst="rect">
@@ -3481,7 +3673,7 @@
           <a:noFill/>
         </p:spPr>
         <p:txBody>
-          <a:bodyPr wrap="square" lIns="0" rIns="0" tIns="0" bIns="0" anchor="t">
+          <a:bodyPr wrap="square" lIns="0" tIns="0" rIns="0" bIns="0" anchor="t">
             <a:spAutoFit/>
           </a:bodyPr>
           <a:lstStyle/>
@@ -3495,26 +3687,26 @@
               </a:spcAft>
             </a:pPr>
             <a:r>
-              <a:rPr sz="930" b="0" i="0">
+              <a:rPr sz="950" b="0" i="0">
                 <a:solidFill>
                   <a:srgbClr val="334155"/>
                 </a:solidFill>
                 <a:latin typeface="Aptos"/>
               </a:rPr>
-              <a:t>B. Doctor partner: Consultant Medical Oncologist / Inpatient Ward Attending. Co-designed workflows, reviewed CTCAE v5.0 thresholds, calibrated 120+ drug phonetic rules and reviewed febrile-neutropenia criteria.</a:t>
-            </a:r>
-          </a:p>
-        </p:txBody>
-      </p:sp>
-      <p:sp>
-        <p:nvSpPr>
-          <p:cNvPr id="12" name="TextBox 11"/>
+              <a:t>Oncology ward rounds require synthesis of spoken symptoms, printed CBC sheets and cumulative toxicity calculations under time pressure.</a:t>
+            </a:r>
+          </a:p>
+        </p:txBody>
+      </p:sp>
+      <p:sp>
+        <p:nvSpPr>
+          <p:cNvPr id="17" name="TextBox 16"/>
           <p:cNvSpPr txBox="1"/>
           <p:nvPr/>
         </p:nvSpPr>
         <p:spPr>
           <a:xfrm>
-            <a:off x="640080" y="2514600"/>
+            <a:off x="640080" y="4279392"/>
             <a:ext cx="3950208" cy="548640"/>
           </a:xfrm>
           <a:prstGeom prst="rect">
@@ -3523,7 +3715,7 @@
           <a:noFill/>
         </p:spPr>
         <p:txBody>
-          <a:bodyPr wrap="square" lIns="0" rIns="0" tIns="0" bIns="0" anchor="t">
+          <a:bodyPr wrap="square" lIns="0" tIns="0" rIns="0" bIns="0" anchor="t">
             <a:spAutoFit/>
           </a:bodyPr>
           <a:lstStyle/>
@@ -3537,27 +3729,111 @@
               </a:spcAft>
             </a:pPr>
             <a:r>
-              <a:rPr sz="930" b="0" i="0">
+              <a:rPr sz="950" b="0" i="0">
                 <a:solidFill>
                   <a:srgbClr val="334155"/>
                 </a:solidFill>
                 <a:latin typeface="Aptos"/>
               </a:rPr>
-              <a:t>Organisation context: Healthcare Engineering &amp; Oncology Research Collaboration.</a:t>
-            </a:r>
-          </a:p>
-        </p:txBody>
-      </p:sp>
-      <p:sp>
-        <p:nvSpPr>
-          <p:cNvPr id="13" name="Rectangle 12"/>
+              <a:t>The project brief states clinicians spend over 20 minutes per patient on manual documentation and cites &gt;45% of ward hours spent on EMR data entry.</a:t>
+            </a:r>
+          </a:p>
+        </p:txBody>
+      </p:sp>
+      <p:sp>
+        <p:nvSpPr>
+          <p:cNvPr id="18" name="TextBox 17"/>
+          <p:cNvSpPr txBox="1"/>
+          <p:nvPr/>
+        </p:nvSpPr>
+        <p:spPr>
+          <a:xfrm>
+            <a:off x="640080" y="4855464"/>
+            <a:ext cx="3950208" cy="548640"/>
+          </a:xfrm>
+          <a:prstGeom prst="rect">
+            <a:avLst/>
+          </a:prstGeom>
+          <a:noFill/>
+        </p:spPr>
+        <p:txBody>
+          <a:bodyPr wrap="square" lIns="0" tIns="0" rIns="0" bIns="0" anchor="t">
+            <a:spAutoFit/>
+          </a:bodyPr>
+          <a:lstStyle/>
+          <a:p>
+            <a:pPr algn="l">
+              <a:spcBef>
+                <a:spcPts val="0"/>
+              </a:spcBef>
+              <a:spcAft>
+                <a:spcPts val="300"/>
+              </a:spcAft>
+            </a:pPr>
+            <a:r>
+              <a:rPr sz="950" b="0" i="0">
+                <a:solidFill>
+                  <a:srgbClr val="334155"/>
+                </a:solidFill>
+                <a:latin typeface="Aptos"/>
+              </a:rPr>
+              <a:t>Generic speech tools may misrender chemotherapy names (e.g., “fall fox” for mFOLFOX6); cloud speech creates audio privacy and recurring-cost concerns.</a:t>
+            </a:r>
+          </a:p>
+        </p:txBody>
+      </p:sp>
+      <p:sp>
+        <p:nvSpPr>
+          <p:cNvPr id="19" name="TextBox 18"/>
+          <p:cNvSpPr txBox="1"/>
+          <p:nvPr/>
+        </p:nvSpPr>
+        <p:spPr>
+          <a:xfrm>
+            <a:off x="640080" y="5431536"/>
+            <a:ext cx="3950208" cy="548640"/>
+          </a:xfrm>
+          <a:prstGeom prst="rect">
+            <a:avLst/>
+          </a:prstGeom>
+          <a:noFill/>
+        </p:spPr>
+        <p:txBody>
+          <a:bodyPr wrap="square" lIns="0" tIns="0" rIns="0" bIns="0" anchor="t">
+            <a:spAutoFit/>
+          </a:bodyPr>
+          <a:lstStyle/>
+          <a:p>
+            <a:pPr algn="l">
+              <a:spcBef>
+                <a:spcPts val="0"/>
+              </a:spcBef>
+              <a:spcAft>
+                <a:spcPts val="300"/>
+              </a:spcAft>
+            </a:pPr>
+            <a:r>
+              <a:rPr sz="950" b="0" i="0">
+                <a:solidFill>
+                  <a:srgbClr val="334155"/>
+                </a:solidFill>
+                <a:latin typeface="Aptos"/>
+              </a:rPr>
+              <a:t>The supplied brief cites an ~8% rise in 28-day mortality per hour of antibiotic delay in neutropenic sepsis (IDSA/ASCO 2018).</a:t>
+            </a:r>
+          </a:p>
+        </p:txBody>
+      </p:sp>
+      <p:sp>
+        <p:nvSpPr>
+          <p:cNvPr id="20" name="Rectangle 19"/>
           <p:cNvSpPr/>
           <p:nvPr/>
         </p:nvSpPr>
         <p:spPr>
           <a:xfrm>
-            <a:off x="502920" y="3273552"/>
-            <a:ext cx="4224528" cy="2724912"/>
+            <a:off x="4919472" y="932688"/>
+            <a:ext cx="6766560" cy="1947672"/>
           </a:xfrm>
           <a:prstGeom prst="rect">
             <a:avLst/>
@@ -3590,19 +3866,20 @@
           <a:lstStyle/>
           <a:p>
             <a:pPr algn="ctr"/>
-          </a:p>
-        </p:txBody>
-      </p:sp>
-      <p:sp>
-        <p:nvSpPr>
-          <p:cNvPr id="14" name="TextBox 13"/>
+            <a:endParaRPr/>
+          </a:p>
+        </p:txBody>
+      </p:sp>
+      <p:sp>
+        <p:nvSpPr>
+          <p:cNvPr id="21" name="TextBox 20"/>
           <p:cNvSpPr txBox="1"/>
           <p:nvPr/>
         </p:nvSpPr>
         <p:spPr>
           <a:xfrm>
-            <a:off x="612648" y="3337560"/>
-            <a:ext cx="4005072" cy="228600"/>
+            <a:off x="5029200" y="996696"/>
+            <a:ext cx="6547104" cy="228600"/>
           </a:xfrm>
           <a:prstGeom prst="rect">
             <a:avLst/>
@@ -3610,7 +3887,7 @@
           <a:noFill/>
         </p:spPr>
         <p:txBody>
-          <a:bodyPr wrap="square" lIns="0" rIns="0" tIns="0" bIns="0" anchor="t">
+          <a:bodyPr wrap="square" lIns="0" tIns="0" rIns="0" bIns="0" anchor="t">
             <a:spAutoFit/>
           </a:bodyPr>
           <a:lstStyle/>
@@ -3626,32 +3903,32 @@
             <a:r>
               <a:rPr sz="1060" b="1" i="0">
                 <a:solidFill>
-                  <a:srgbClr val="1A4599"/>
+                  <a:srgbClr val="00843D"/>
                 </a:solidFill>
                 <a:latin typeface="Aptos"/>
               </a:rPr>
-              <a:t>Problem Statement (Use Case Specific)</a:t>
+              <a:t>AI Solution Description</a:t>
             </a:r>
           </a:p>
         </p:txBody>
       </p:sp>
       <p:cxnSp>
         <p:nvCxnSpPr>
-          <p:cNvPr id="15" name="Connector 14"/>
+          <p:cNvPr id="22" name="Connector 21"/>
           <p:cNvCxnSpPr/>
           <p:nvPr/>
         </p:nvCxnSpPr>
         <p:spPr>
           <a:xfrm>
-            <a:off x="612648" y="3602736"/>
-            <a:ext cx="4005072" cy="0"/>
+            <a:off x="5029200" y="1261872"/>
+            <a:ext cx="6547104" cy="0"/>
           </a:xfrm>
           <a:prstGeom prst="line">
             <a:avLst/>
           </a:prstGeom>
           <a:ln w="8890">
             <a:solidFill>
-              <a:srgbClr val="1A4599"/>
+              <a:srgbClr val="00843D"/>
             </a:solidFill>
           </a:ln>
         </p:spPr>
@@ -3672,14 +3949,14 @@
       </p:cxnSp>
       <p:sp>
         <p:nvSpPr>
-          <p:cNvPr id="16" name="TextBox 15"/>
+          <p:cNvPr id="23" name="TextBox 22"/>
           <p:cNvSpPr txBox="1"/>
           <p:nvPr/>
         </p:nvSpPr>
         <p:spPr>
           <a:xfrm>
-            <a:off x="640080" y="3703320"/>
-            <a:ext cx="3950208" cy="548640"/>
+            <a:off x="5056632" y="1362456"/>
+            <a:ext cx="6492240" cy="1453895"/>
           </a:xfrm>
           <a:prstGeom prst="rect">
             <a:avLst/>
@@ -3687,7 +3964,7 @@
           <a:noFill/>
         </p:spPr>
         <p:txBody>
-          <a:bodyPr wrap="square" lIns="0" rIns="0" tIns="0" bIns="0" anchor="t">
+          <a:bodyPr wrap="square" lIns="0" tIns="0" rIns="0" bIns="0" anchor="t">
             <a:spAutoFit/>
           </a:bodyPr>
           <a:lstStyle/>
@@ -3701,27 +3978,73 @@
               </a:spcAft>
             </a:pPr>
             <a:r>
-              <a:rPr sz="950" b="0" i="0">
+              <a:rPr sz="1019" b="0" i="0">
                 <a:solidFill>
                   <a:srgbClr val="334155"/>
                 </a:solidFill>
                 <a:latin typeface="Aptos"/>
               </a:rPr>
-              <a:t>Oncology ward rounds require synthesis of spoken symptoms, printed CBC sheets and cumulative toxicity calculations under time pressure.</a:t>
-            </a:r>
-          </a:p>
-        </p:txBody>
-      </p:sp>
-      <p:sp>
-        <p:nvSpPr>
-          <p:cNvPr id="17" name="TextBox 16"/>
+              <a:t>RoundsAI is a dual-tier clinical copilot connecting a Bedside Mobile Companion (/mobile) with a Doctor Assessment Station (/). Residents dictate symptoms and photograph CBC reports; audio is transcribed locally, oncology terminology is normalized, lab values are extracted, CTCAE grades and screening flags are generated, and the draft synchronizes for clinician review and attestation. A formatted note can then be copied into the EMR workflow.</a:t>
+            </a:r>
+          </a:p>
+        </p:txBody>
+      </p:sp>
+      <p:sp>
+        <p:nvSpPr>
+          <p:cNvPr id="24" name="Rectangle 23"/>
+          <p:cNvSpPr/>
+          <p:nvPr/>
+        </p:nvSpPr>
+        <p:spPr>
+          <a:xfrm>
+            <a:off x="4919472" y="3017520"/>
+            <a:ext cx="6766560" cy="1298448"/>
+          </a:xfrm>
+          <a:prstGeom prst="rect">
+            <a:avLst/>
+          </a:prstGeom>
+          <a:solidFill>
+            <a:srgbClr val="FFFFFF"/>
+          </a:solidFill>
+          <a:ln w="11430">
+            <a:solidFill>
+              <a:srgbClr val="CBD5E1"/>
+            </a:solidFill>
+          </a:ln>
+        </p:spPr>
+        <p:style>
+          <a:lnRef idx="1">
+            <a:schemeClr val="accent1"/>
+          </a:lnRef>
+          <a:fillRef idx="3">
+            <a:schemeClr val="accent1"/>
+          </a:fillRef>
+          <a:effectRef idx="2">
+            <a:schemeClr val="accent1"/>
+          </a:effectRef>
+          <a:fontRef idx="minor">
+            <a:schemeClr val="lt1"/>
+          </a:fontRef>
+        </p:style>
+        <p:txBody>
+          <a:bodyPr rtlCol="0" anchor="ctr"/>
+          <a:lstStyle/>
+          <a:p>
+            <a:pPr algn="ctr"/>
+            <a:endParaRPr/>
+          </a:p>
+        </p:txBody>
+      </p:sp>
+      <p:sp>
+        <p:nvSpPr>
+          <p:cNvPr id="25" name="TextBox 24"/>
           <p:cNvSpPr txBox="1"/>
           <p:nvPr/>
         </p:nvSpPr>
         <p:spPr>
           <a:xfrm>
-            <a:off x="640080" y="4279392"/>
-            <a:ext cx="3950208" cy="548640"/>
+            <a:off x="5029200" y="3081527"/>
+            <a:ext cx="6547104" cy="228600"/>
           </a:xfrm>
           <a:prstGeom prst="rect">
             <a:avLst/>
@@ -3729,7 +4052,7 @@
           <a:noFill/>
         </p:spPr>
         <p:txBody>
-          <a:bodyPr wrap="square" lIns="0" rIns="0" tIns="0" bIns="0" anchor="t">
+          <a:bodyPr wrap="square" lIns="0" tIns="0" rIns="0" bIns="0" anchor="t">
             <a:spAutoFit/>
           </a:bodyPr>
           <a:lstStyle/>
@@ -3743,27 +4066,62 @@
               </a:spcAft>
             </a:pPr>
             <a:r>
-              <a:rPr sz="950" b="0" i="0">
-                <a:solidFill>
-                  <a:srgbClr val="334155"/>
+              <a:rPr sz="1060" b="1" i="0">
+                <a:solidFill>
+                  <a:srgbClr val="1A4599"/>
                 </a:solidFill>
                 <a:latin typeface="Aptos"/>
               </a:rPr>
-              <a:t>The project brief states clinicians spend over 20 minutes per patient on manual documentation and cites &gt;45% of ward hours spent on EMR data entry.</a:t>
-            </a:r>
-          </a:p>
-        </p:txBody>
-      </p:sp>
-      <p:sp>
-        <p:nvSpPr>
-          <p:cNvPr id="18" name="TextBox 17"/>
+              <a:t>Technology and Tools Used</a:t>
+            </a:r>
+          </a:p>
+        </p:txBody>
+      </p:sp>
+      <p:cxnSp>
+        <p:nvCxnSpPr>
+          <p:cNvPr id="26" name="Connector 25"/>
+          <p:cNvCxnSpPr/>
+          <p:nvPr/>
+        </p:nvCxnSpPr>
+        <p:spPr>
+          <a:xfrm>
+            <a:off x="5029200" y="3346703"/>
+            <a:ext cx="6547104" cy="0"/>
+          </a:xfrm>
+          <a:prstGeom prst="line">
+            <a:avLst/>
+          </a:prstGeom>
+          <a:ln w="8890">
+            <a:solidFill>
+              <a:srgbClr val="1A4599"/>
+            </a:solidFill>
+          </a:ln>
+        </p:spPr>
+        <p:style>
+          <a:lnRef idx="2">
+            <a:schemeClr val="accent1"/>
+          </a:lnRef>
+          <a:fillRef idx="0">
+            <a:schemeClr val="accent1"/>
+          </a:fillRef>
+          <a:effectRef idx="1">
+            <a:schemeClr val="accent1"/>
+          </a:effectRef>
+          <a:fontRef idx="minor">
+            <a:schemeClr val="tx1"/>
+          </a:fontRef>
+        </p:style>
+      </p:cxnSp>
+      <p:sp>
+        <p:nvSpPr>
+          <p:cNvPr id="27" name="TextBox 26"/>
           <p:cNvSpPr txBox="1"/>
           <p:nvPr/>
         </p:nvSpPr>
         <p:spPr>
           <a:xfrm>
-            <a:off x="640080" y="4855464"/>
-            <a:ext cx="3950208" cy="548640"/>
+            <a:off x="5056632" y="3447287"/>
+            <a:ext cx="6492240" cy="804671"/>
           </a:xfrm>
           <a:prstGeom prst="rect">
             <a:avLst/>
@@ -3771,7 +4129,7 @@
           <a:noFill/>
         </p:spPr>
         <p:txBody>
-          <a:bodyPr wrap="square" lIns="0" rIns="0" tIns="0" bIns="0" anchor="t">
+          <a:bodyPr wrap="square" lIns="0" tIns="0" rIns="0" bIns="0" anchor="t">
             <a:spAutoFit/>
           </a:bodyPr>
           <a:lstStyle/>
@@ -3785,27 +4143,73 @@
               </a:spcAft>
             </a:pPr>
             <a:r>
-              <a:rPr sz="950" b="0" i="0">
+              <a:rPr sz="1000" b="0" i="0">
                 <a:solidFill>
                   <a:srgbClr val="334155"/>
                 </a:solidFill>
                 <a:latin typeface="Aptos"/>
               </a:rPr>
-              <a:t>Generic speech tools may misrender chemotherapy names (e.g., “fall fox” for mFOLFOX6); cloud speech creates audio privacy and recurring-cost concerns.</a:t>
-            </a:r>
-          </a:p>
-        </p:txBody>
-      </p:sp>
-      <p:sp>
-        <p:nvSpPr>
-          <p:cNvPr id="19" name="TextBox 18"/>
+              <a:t>faster-whisper base int8 (local CPU) • Gemini 2.5 Flash OCR • FastAPI / Python 3.12+ • Pydantic v2 • Next.js 15 / TypeScript / React 19 • SQLite or Supabase PostgreSQL • Server-Sent Events with 5-second polling fallback.</a:t>
+            </a:r>
+          </a:p>
+        </p:txBody>
+      </p:sp>
+      <p:sp>
+        <p:nvSpPr>
+          <p:cNvPr id="28" name="Rectangle 27"/>
+          <p:cNvSpPr/>
+          <p:nvPr/>
+        </p:nvSpPr>
+        <p:spPr>
+          <a:xfrm>
+            <a:off x="4919472" y="4453128"/>
+            <a:ext cx="6766560" cy="1545336"/>
+          </a:xfrm>
+          <a:prstGeom prst="rect">
+            <a:avLst/>
+          </a:prstGeom>
+          <a:solidFill>
+            <a:srgbClr val="FFFFFF"/>
+          </a:solidFill>
+          <a:ln w="11430">
+            <a:solidFill>
+              <a:srgbClr val="CBD5E1"/>
+            </a:solidFill>
+          </a:ln>
+        </p:spPr>
+        <p:style>
+          <a:lnRef idx="1">
+            <a:schemeClr val="accent1"/>
+          </a:lnRef>
+          <a:fillRef idx="3">
+            <a:schemeClr val="accent1"/>
+          </a:fillRef>
+          <a:effectRef idx="2">
+            <a:schemeClr val="accent1"/>
+          </a:effectRef>
+          <a:fontRef idx="minor">
+            <a:schemeClr val="lt1"/>
+          </a:fontRef>
+        </p:style>
+        <p:txBody>
+          <a:bodyPr rtlCol="0" anchor="ctr"/>
+          <a:lstStyle/>
+          <a:p>
+            <a:pPr algn="ctr"/>
+            <a:endParaRPr/>
+          </a:p>
+        </p:txBody>
+      </p:sp>
+      <p:sp>
+        <p:nvSpPr>
+          <p:cNvPr id="29" name="TextBox 28"/>
           <p:cNvSpPr txBox="1"/>
           <p:nvPr/>
         </p:nvSpPr>
         <p:spPr>
           <a:xfrm>
-            <a:off x="640080" y="5431536"/>
-            <a:ext cx="3950208" cy="548640"/>
+            <a:off x="5029200" y="4517136"/>
+            <a:ext cx="6547104" cy="228600"/>
           </a:xfrm>
           <a:prstGeom prst="rect">
             <a:avLst/>
@@ -3813,7 +4217,7 @@
           <a:noFill/>
         </p:spPr>
         <p:txBody>
-          <a:bodyPr wrap="square" lIns="0" rIns="0" tIns="0" bIns="0" anchor="t">
+          <a:bodyPr wrap="square" lIns="0" tIns="0" rIns="0" bIns="0" anchor="t">
             <a:spAutoFit/>
           </a:bodyPr>
           <a:lstStyle/>
@@ -3827,72 +4231,62 @@
               </a:spcAft>
             </a:pPr>
             <a:r>
-              <a:rPr sz="950" b="0" i="0">
-                <a:solidFill>
-                  <a:srgbClr val="334155"/>
+              <a:rPr sz="1060" b="1" i="0">
+                <a:solidFill>
+                  <a:srgbClr val="00843D"/>
                 </a:solidFill>
                 <a:latin typeface="Aptos"/>
               </a:rPr>
-              <a:t>The supplied brief cites an ~8% rise in 28-day mortality per hour of antibiotic delay in neutropenic sepsis (IDSA/ASCO 2018).</a:t>
-            </a:r>
-          </a:p>
-        </p:txBody>
-      </p:sp>
-      <p:sp>
-        <p:nvSpPr>
-          <p:cNvPr id="20" name="Rectangle 19"/>
-          <p:cNvSpPr/>
-          <p:nvPr/>
-        </p:nvSpPr>
-        <p:spPr>
-          <a:xfrm>
-            <a:off x="4919472" y="932688"/>
-            <a:ext cx="6766560" cy="1947672"/>
-          </a:xfrm>
-          <a:prstGeom prst="rect">
-            <a:avLst/>
-          </a:prstGeom>
-          <a:solidFill>
-            <a:srgbClr val="FFFFFF"/>
-          </a:solidFill>
-          <a:ln w="11430">
+              <a:t>Key Features of the Solution</a:t>
+            </a:r>
+          </a:p>
+        </p:txBody>
+      </p:sp>
+      <p:cxnSp>
+        <p:nvCxnSpPr>
+          <p:cNvPr id="30" name="Connector 29"/>
+          <p:cNvCxnSpPr/>
+          <p:nvPr/>
+        </p:nvCxnSpPr>
+        <p:spPr>
+          <a:xfrm>
+            <a:off x="5029200" y="4782312"/>
+            <a:ext cx="6547104" cy="0"/>
+          </a:xfrm>
+          <a:prstGeom prst="line">
+            <a:avLst/>
+          </a:prstGeom>
+          <a:ln w="8890">
             <a:solidFill>
-              <a:srgbClr val="CBD5E1"/>
+              <a:srgbClr val="00843D"/>
             </a:solidFill>
           </a:ln>
         </p:spPr>
         <p:style>
-          <a:lnRef idx="1">
+          <a:lnRef idx="2">
             <a:schemeClr val="accent1"/>
           </a:lnRef>
-          <a:fillRef idx="3">
+          <a:fillRef idx="0">
             <a:schemeClr val="accent1"/>
           </a:fillRef>
-          <a:effectRef idx="2">
+          <a:effectRef idx="1">
             <a:schemeClr val="accent1"/>
           </a:effectRef>
           <a:fontRef idx="minor">
-            <a:schemeClr val="lt1"/>
+            <a:schemeClr val="tx1"/>
           </a:fontRef>
         </p:style>
-        <p:txBody>
-          <a:bodyPr rtlCol="0" anchor="ctr"/>
-          <a:lstStyle/>
-          <a:p>
-            <a:pPr algn="ctr"/>
-          </a:p>
-        </p:txBody>
-      </p:sp>
-      <p:sp>
-        <p:nvSpPr>
-          <p:cNvPr id="21" name="TextBox 20"/>
+      </p:cxnSp>
+      <p:sp>
+        <p:nvSpPr>
+          <p:cNvPr id="31" name="TextBox 30"/>
           <p:cNvSpPr txBox="1"/>
           <p:nvPr/>
         </p:nvSpPr>
         <p:spPr>
           <a:xfrm>
-            <a:off x="5029200" y="996696"/>
-            <a:ext cx="6547104" cy="228600"/>
+            <a:off x="5056632" y="4882896"/>
+            <a:ext cx="6492240" cy="212140"/>
           </a:xfrm>
           <a:prstGeom prst="rect">
             <a:avLst/>
@@ -3900,7 +4294,7 @@
           <a:noFill/>
         </p:spPr>
         <p:txBody>
-          <a:bodyPr wrap="square" lIns="0" rIns="0" tIns="0" bIns="0" anchor="t">
+          <a:bodyPr wrap="square" lIns="0" tIns="0" rIns="0" bIns="0" anchor="t">
             <a:spAutoFit/>
           </a:bodyPr>
           <a:lstStyle/>
@@ -3914,62 +4308,27 @@
               </a:spcAft>
             </a:pPr>
             <a:r>
-              <a:rPr sz="1060" b="1" i="0">
-                <a:solidFill>
-                  <a:srgbClr val="00843D"/>
+              <a:rPr sz="930" b="0" i="0">
+                <a:solidFill>
+                  <a:srgbClr val="334155"/>
                 </a:solidFill>
                 <a:latin typeface="Aptos"/>
               </a:rPr>
-              <a:t>AI Solution Description</a:t>
-            </a:r>
-          </a:p>
-        </p:txBody>
-      </p:sp>
-      <p:cxnSp>
-        <p:nvCxnSpPr>
-          <p:cNvPr id="22" name="Connector 21"/>
-          <p:cNvCxnSpPr/>
-          <p:nvPr/>
-        </p:nvCxnSpPr>
-        <p:spPr>
-          <a:xfrm>
-            <a:off x="5029200" y="1261872"/>
-            <a:ext cx="6547104" cy="0"/>
-          </a:xfrm>
-          <a:prstGeom prst="line">
-            <a:avLst/>
-          </a:prstGeom>
-          <a:ln w="8890">
-            <a:solidFill>
-              <a:srgbClr val="00843D"/>
-            </a:solidFill>
-          </a:ln>
-        </p:spPr>
-        <p:style>
-          <a:lnRef idx="2">
-            <a:schemeClr val="accent1"/>
-          </a:lnRef>
-          <a:fillRef idx="0">
-            <a:schemeClr val="accent1"/>
-          </a:fillRef>
-          <a:effectRef idx="1">
-            <a:schemeClr val="accent1"/>
-          </a:effectRef>
-          <a:fontRef idx="minor">
-            <a:schemeClr val="tx1"/>
-          </a:fontRef>
-        </p:style>
-      </p:cxnSp>
-      <p:sp>
-        <p:nvSpPr>
-          <p:cNvPr id="23" name="TextBox 22"/>
+              <a:t>Local Whisper transcription with no cloud speech audio egress.</a:t>
+            </a:r>
+          </a:p>
+        </p:txBody>
+      </p:sp>
+      <p:sp>
+        <p:nvSpPr>
+          <p:cNvPr id="32" name="TextBox 31"/>
           <p:cNvSpPr txBox="1"/>
           <p:nvPr/>
         </p:nvSpPr>
         <p:spPr>
           <a:xfrm>
-            <a:off x="5056632" y="1362456"/>
-            <a:ext cx="6492240" cy="1453895"/>
+            <a:off x="5056632" y="5122468"/>
+            <a:ext cx="6492240" cy="212140"/>
           </a:xfrm>
           <a:prstGeom prst="rect">
             <a:avLst/>
@@ -3977,7 +4336,7 @@
           <a:noFill/>
         </p:spPr>
         <p:txBody>
-          <a:bodyPr wrap="square" lIns="0" rIns="0" tIns="0" bIns="0" anchor="t">
+          <a:bodyPr wrap="square" lIns="0" tIns="0" rIns="0" bIns="0" anchor="t">
             <a:spAutoFit/>
           </a:bodyPr>
           <a:lstStyle/>
@@ -3991,72 +4350,27 @@
               </a:spcAft>
             </a:pPr>
             <a:r>
-              <a:rPr sz="1019" b="0" i="0">
+              <a:rPr sz="930" b="0" i="0">
                 <a:solidFill>
                   <a:srgbClr val="334155"/>
                 </a:solidFill>
                 <a:latin typeface="Aptos"/>
               </a:rPr>
-              <a:t>RoundsAI is a dual-tier clinical copilot connecting a Bedside Mobile Companion (/mobile) with a Doctor Assessment Station (/). Residents dictate symptoms and photograph CBC reports; audio is transcribed locally, oncology terminology is normalized, lab values are extracted, CTCAE grades and screening flags are generated, and the draft synchronizes for clinician review and attestation. A formatted note can then be copied into the EMR workflow.</a:t>
-            </a:r>
-          </a:p>
-        </p:txBody>
-      </p:sp>
-      <p:sp>
-        <p:nvSpPr>
-          <p:cNvPr id="24" name="Rectangle 23"/>
-          <p:cNvSpPr/>
-          <p:nvPr/>
-        </p:nvSpPr>
-        <p:spPr>
-          <a:xfrm>
-            <a:off x="4919472" y="3017520"/>
-            <a:ext cx="6766560" cy="1298448"/>
-          </a:xfrm>
-          <a:prstGeom prst="rect">
-            <a:avLst/>
-          </a:prstGeom>
-          <a:solidFill>
-            <a:srgbClr val="FFFFFF"/>
-          </a:solidFill>
-          <a:ln w="11430">
-            <a:solidFill>
-              <a:srgbClr val="CBD5E1"/>
-            </a:solidFill>
-          </a:ln>
-        </p:spPr>
-        <p:style>
-          <a:lnRef idx="1">
-            <a:schemeClr val="accent1"/>
-          </a:lnRef>
-          <a:fillRef idx="3">
-            <a:schemeClr val="accent1"/>
-          </a:fillRef>
-          <a:effectRef idx="2">
-            <a:schemeClr val="accent1"/>
-          </a:effectRef>
-          <a:fontRef idx="minor">
-            <a:schemeClr val="lt1"/>
-          </a:fontRef>
-        </p:style>
-        <p:txBody>
-          <a:bodyPr rtlCol="0" anchor="ctr"/>
-          <a:lstStyle/>
-          <a:p>
-            <a:pPr algn="ctr"/>
-          </a:p>
-        </p:txBody>
-      </p:sp>
-      <p:sp>
-        <p:nvSpPr>
-          <p:cNvPr id="25" name="TextBox 24"/>
+              <a:t>120+ oncology regimen / clinical phonetic normalization rules.</a:t>
+            </a:r>
+          </a:p>
+        </p:txBody>
+      </p:sp>
+      <p:sp>
+        <p:nvSpPr>
+          <p:cNvPr id="33" name="TextBox 32"/>
           <p:cNvSpPr txBox="1"/>
           <p:nvPr/>
         </p:nvSpPr>
         <p:spPr>
           <a:xfrm>
-            <a:off x="5029200" y="3081527"/>
-            <a:ext cx="6547104" cy="228600"/>
+            <a:off x="5056632" y="5362041"/>
+            <a:ext cx="6492240" cy="212140"/>
           </a:xfrm>
           <a:prstGeom prst="rect">
             <a:avLst/>
@@ -4064,7 +4378,7 @@
           <a:noFill/>
         </p:spPr>
         <p:txBody>
-          <a:bodyPr wrap="square" lIns="0" rIns="0" tIns="0" bIns="0" anchor="t">
+          <a:bodyPr wrap="square" lIns="0" tIns="0" rIns="0" bIns="0" anchor="t">
             <a:spAutoFit/>
           </a:bodyPr>
           <a:lstStyle/>
@@ -4078,62 +4392,27 @@
               </a:spcAft>
             </a:pPr>
             <a:r>
-              <a:rPr sz="1060" b="1" i="0">
-                <a:solidFill>
-                  <a:srgbClr val="1A4599"/>
+              <a:rPr sz="930" b="0" i="0">
+                <a:solidFill>
+                  <a:srgbClr val="334155"/>
                 </a:solidFill>
                 <a:latin typeface="Aptos"/>
               </a:rPr>
-              <a:t>Technology and Tools Used</a:t>
-            </a:r>
-          </a:p>
-        </p:txBody>
-      </p:sp>
-      <p:cxnSp>
-        <p:nvCxnSpPr>
-          <p:cNvPr id="26" name="Connector 25"/>
-          <p:cNvCxnSpPr/>
-          <p:nvPr/>
-        </p:nvCxnSpPr>
-        <p:spPr>
-          <a:xfrm>
-            <a:off x="5029200" y="3346703"/>
-            <a:ext cx="6547104" cy="0"/>
-          </a:xfrm>
-          <a:prstGeom prst="line">
-            <a:avLst/>
-          </a:prstGeom>
-          <a:ln w="8890">
-            <a:solidFill>
-              <a:srgbClr val="1A4599"/>
-            </a:solidFill>
-          </a:ln>
-        </p:spPr>
-        <p:style>
-          <a:lnRef idx="2">
-            <a:schemeClr val="accent1"/>
-          </a:lnRef>
-          <a:fillRef idx="0">
-            <a:schemeClr val="accent1"/>
-          </a:fillRef>
-          <a:effectRef idx="1">
-            <a:schemeClr val="accent1"/>
-          </a:effectRef>
-          <a:fontRef idx="minor">
-            <a:schemeClr val="tx1"/>
-          </a:fontRef>
-        </p:style>
-      </p:cxnSp>
-      <p:sp>
-        <p:nvSpPr>
-          <p:cNvPr id="27" name="TextBox 26"/>
+              <a:t>Multimodal CBC OCR for ANC, platelets, WBC and hemoglobin.</a:t>
+            </a:r>
+          </a:p>
+        </p:txBody>
+      </p:sp>
+      <p:sp>
+        <p:nvSpPr>
+          <p:cNvPr id="34" name="TextBox 33"/>
           <p:cNvSpPr txBox="1"/>
           <p:nvPr/>
         </p:nvSpPr>
         <p:spPr>
           <a:xfrm>
-            <a:off x="5056632" y="3447287"/>
-            <a:ext cx="6492240" cy="804671"/>
+            <a:off x="5056632" y="5601614"/>
+            <a:ext cx="6492240" cy="212140"/>
           </a:xfrm>
           <a:prstGeom prst="rect">
             <a:avLst/>
@@ -4141,7 +4420,7 @@
           <a:noFill/>
         </p:spPr>
         <p:txBody>
-          <a:bodyPr wrap="square" lIns="0" rIns="0" tIns="0" bIns="0" anchor="t">
+          <a:bodyPr wrap="square" lIns="0" tIns="0" rIns="0" bIns="0" anchor="t">
             <a:spAutoFit/>
           </a:bodyPr>
           <a:lstStyle/>
@@ -4155,72 +4434,27 @@
               </a:spcAft>
             </a:pPr>
             <a:r>
-              <a:rPr sz="1000" b="0" i="0">
+              <a:rPr sz="930" b="0" i="0">
                 <a:solidFill>
                   <a:srgbClr val="334155"/>
                 </a:solidFill>
                 <a:latin typeface="Aptos"/>
               </a:rPr>
-              <a:t>faster-whisper base int8 (local CPU) • Gemini 2.5 Flash OCR • FastAPI / Python 3.12+ • Pydantic v2 • Next.js 15 / TypeScript / React 19 • SQLite or Supabase PostgreSQL • Server-Sent Events with 5-second polling fallback.</a:t>
-            </a:r>
-          </a:p>
-        </p:txBody>
-      </p:sp>
-      <p:sp>
-        <p:nvSpPr>
-          <p:cNvPr id="28" name="Rectangle 27"/>
-          <p:cNvSpPr/>
-          <p:nvPr/>
-        </p:nvSpPr>
-        <p:spPr>
-          <a:xfrm>
-            <a:off x="4919472" y="4453128"/>
-            <a:ext cx="6766560" cy="1545336"/>
-          </a:xfrm>
-          <a:prstGeom prst="rect">
-            <a:avLst/>
-          </a:prstGeom>
-          <a:solidFill>
-            <a:srgbClr val="FFFFFF"/>
-          </a:solidFill>
-          <a:ln w="11430">
-            <a:solidFill>
-              <a:srgbClr val="CBD5E1"/>
-            </a:solidFill>
-          </a:ln>
-        </p:spPr>
-        <p:style>
-          <a:lnRef idx="1">
-            <a:schemeClr val="accent1"/>
-          </a:lnRef>
-          <a:fillRef idx="3">
-            <a:schemeClr val="accent1"/>
-          </a:fillRef>
-          <a:effectRef idx="2">
-            <a:schemeClr val="accent1"/>
-          </a:effectRef>
-          <a:fontRef idx="minor">
-            <a:schemeClr val="lt1"/>
-          </a:fontRef>
-        </p:style>
-        <p:txBody>
-          <a:bodyPr rtlCol="0" anchor="ctr"/>
-          <a:lstStyle/>
-          <a:p>
-            <a:pPr algn="ctr"/>
-          </a:p>
-        </p:txBody>
-      </p:sp>
-      <p:sp>
-        <p:nvSpPr>
-          <p:cNvPr id="29" name="TextBox 28"/>
+              <a:t>Rules-based CTCAE v5.0 grading and safety-screening sentinels for clinician review.</a:t>
+            </a:r>
+          </a:p>
+        </p:txBody>
+      </p:sp>
+      <p:sp>
+        <p:nvSpPr>
+          <p:cNvPr id="35" name="TextBox 34"/>
           <p:cNvSpPr txBox="1"/>
           <p:nvPr/>
         </p:nvSpPr>
         <p:spPr>
           <a:xfrm>
-            <a:off x="5029200" y="4517136"/>
-            <a:ext cx="6547104" cy="228600"/>
+            <a:off x="5047488" y="5802782"/>
+            <a:ext cx="6492240" cy="212140"/>
           </a:xfrm>
           <a:prstGeom prst="rect">
             <a:avLst/>
@@ -4228,7 +4462,7 @@
           <a:noFill/>
         </p:spPr>
         <p:txBody>
-          <a:bodyPr wrap="square" lIns="0" rIns="0" tIns="0" bIns="0" anchor="t">
+          <a:bodyPr wrap="square" lIns="0" tIns="0" rIns="0" bIns="0" anchor="t">
             <a:spAutoFit/>
           </a:bodyPr>
           <a:lstStyle/>
@@ -4242,252 +4476,7 @@
               </a:spcAft>
             </a:pPr>
             <a:r>
-              <a:rPr sz="1060" b="1" i="0">
-                <a:solidFill>
-                  <a:srgbClr val="00843D"/>
-                </a:solidFill>
-                <a:latin typeface="Aptos"/>
-              </a:rPr>
-              <a:t>Key Features of the Solution</a:t>
-            </a:r>
-          </a:p>
-        </p:txBody>
-      </p:sp>
-      <p:cxnSp>
-        <p:nvCxnSpPr>
-          <p:cNvPr id="30" name="Connector 29"/>
-          <p:cNvCxnSpPr/>
-          <p:nvPr/>
-        </p:nvCxnSpPr>
-        <p:spPr>
-          <a:xfrm>
-            <a:off x="5029200" y="4782312"/>
-            <a:ext cx="6547104" cy="0"/>
-          </a:xfrm>
-          <a:prstGeom prst="line">
-            <a:avLst/>
-          </a:prstGeom>
-          <a:ln w="8890">
-            <a:solidFill>
-              <a:srgbClr val="00843D"/>
-            </a:solidFill>
-          </a:ln>
-        </p:spPr>
-        <p:style>
-          <a:lnRef idx="2">
-            <a:schemeClr val="accent1"/>
-          </a:lnRef>
-          <a:fillRef idx="0">
-            <a:schemeClr val="accent1"/>
-          </a:fillRef>
-          <a:effectRef idx="1">
-            <a:schemeClr val="accent1"/>
-          </a:effectRef>
-          <a:fontRef idx="minor">
-            <a:schemeClr val="tx1"/>
-          </a:fontRef>
-        </p:style>
-      </p:cxnSp>
-      <p:sp>
-        <p:nvSpPr>
-          <p:cNvPr id="31" name="TextBox 30"/>
-          <p:cNvSpPr txBox="1"/>
-          <p:nvPr/>
-        </p:nvSpPr>
-        <p:spPr>
-          <a:xfrm>
-            <a:off x="5056632" y="4882896"/>
-            <a:ext cx="6492240" cy="212140"/>
-          </a:xfrm>
-          <a:prstGeom prst="rect">
-            <a:avLst/>
-          </a:prstGeom>
-          <a:noFill/>
-        </p:spPr>
-        <p:txBody>
-          <a:bodyPr wrap="square" lIns="0" rIns="0" tIns="0" bIns="0" anchor="t">
-            <a:spAutoFit/>
-          </a:bodyPr>
-          <a:lstStyle/>
-          <a:p>
-            <a:pPr algn="l">
-              <a:spcBef>
-                <a:spcPts val="0"/>
-              </a:spcBef>
-              <a:spcAft>
-                <a:spcPts val="300"/>
-              </a:spcAft>
-            </a:pPr>
-            <a:r>
-              <a:rPr sz="930" b="0" i="0">
-                <a:solidFill>
-                  <a:srgbClr val="334155"/>
-                </a:solidFill>
-                <a:latin typeface="Aptos"/>
-              </a:rPr>
-              <a:t>Local Whisper transcription with no cloud speech audio egress.</a:t>
-            </a:r>
-          </a:p>
-        </p:txBody>
-      </p:sp>
-      <p:sp>
-        <p:nvSpPr>
-          <p:cNvPr id="32" name="TextBox 31"/>
-          <p:cNvSpPr txBox="1"/>
-          <p:nvPr/>
-        </p:nvSpPr>
-        <p:spPr>
-          <a:xfrm>
-            <a:off x="5056632" y="5122468"/>
-            <a:ext cx="6492240" cy="212140"/>
-          </a:xfrm>
-          <a:prstGeom prst="rect">
-            <a:avLst/>
-          </a:prstGeom>
-          <a:noFill/>
-        </p:spPr>
-        <p:txBody>
-          <a:bodyPr wrap="square" lIns="0" rIns="0" tIns="0" bIns="0" anchor="t">
-            <a:spAutoFit/>
-          </a:bodyPr>
-          <a:lstStyle/>
-          <a:p>
-            <a:pPr algn="l">
-              <a:spcBef>
-                <a:spcPts val="0"/>
-              </a:spcBef>
-              <a:spcAft>
-                <a:spcPts val="300"/>
-              </a:spcAft>
-            </a:pPr>
-            <a:r>
-              <a:rPr sz="930" b="0" i="0">
-                <a:solidFill>
-                  <a:srgbClr val="334155"/>
-                </a:solidFill>
-                <a:latin typeface="Aptos"/>
-              </a:rPr>
-              <a:t>120+ oncology regimen / clinical phonetic normalization rules.</a:t>
-            </a:r>
-          </a:p>
-        </p:txBody>
-      </p:sp>
-      <p:sp>
-        <p:nvSpPr>
-          <p:cNvPr id="33" name="TextBox 32"/>
-          <p:cNvSpPr txBox="1"/>
-          <p:nvPr/>
-        </p:nvSpPr>
-        <p:spPr>
-          <a:xfrm>
-            <a:off x="5056632" y="5362041"/>
-            <a:ext cx="6492240" cy="212140"/>
-          </a:xfrm>
-          <a:prstGeom prst="rect">
-            <a:avLst/>
-          </a:prstGeom>
-          <a:noFill/>
-        </p:spPr>
-        <p:txBody>
-          <a:bodyPr wrap="square" lIns="0" rIns="0" tIns="0" bIns="0" anchor="t">
-            <a:spAutoFit/>
-          </a:bodyPr>
-          <a:lstStyle/>
-          <a:p>
-            <a:pPr algn="l">
-              <a:spcBef>
-                <a:spcPts val="0"/>
-              </a:spcBef>
-              <a:spcAft>
-                <a:spcPts val="300"/>
-              </a:spcAft>
-            </a:pPr>
-            <a:r>
-              <a:rPr sz="930" b="0" i="0">
-                <a:solidFill>
-                  <a:srgbClr val="334155"/>
-                </a:solidFill>
-                <a:latin typeface="Aptos"/>
-              </a:rPr>
-              <a:t>Multimodal CBC OCR for ANC, platelets, WBC and hemoglobin.</a:t>
-            </a:r>
-          </a:p>
-        </p:txBody>
-      </p:sp>
-      <p:sp>
-        <p:nvSpPr>
-          <p:cNvPr id="34" name="TextBox 33"/>
-          <p:cNvSpPr txBox="1"/>
-          <p:nvPr/>
-        </p:nvSpPr>
-        <p:spPr>
-          <a:xfrm>
-            <a:off x="5056632" y="5601614"/>
-            <a:ext cx="6492240" cy="212140"/>
-          </a:xfrm>
-          <a:prstGeom prst="rect">
-            <a:avLst/>
-          </a:prstGeom>
-          <a:noFill/>
-        </p:spPr>
-        <p:txBody>
-          <a:bodyPr wrap="square" lIns="0" rIns="0" tIns="0" bIns="0" anchor="t">
-            <a:spAutoFit/>
-          </a:bodyPr>
-          <a:lstStyle/>
-          <a:p>
-            <a:pPr algn="l">
-              <a:spcBef>
-                <a:spcPts val="0"/>
-              </a:spcBef>
-              <a:spcAft>
-                <a:spcPts val="300"/>
-              </a:spcAft>
-            </a:pPr>
-            <a:r>
-              <a:rPr sz="930" b="0" i="0">
-                <a:solidFill>
-                  <a:srgbClr val="334155"/>
-                </a:solidFill>
-                <a:latin typeface="Aptos"/>
-              </a:rPr>
-              <a:t>Rules-based CTCAE v5.0 grading and safety-screening sentinels for clinician review.</a:t>
-            </a:r>
-          </a:p>
-        </p:txBody>
-      </p:sp>
-      <p:sp>
-        <p:nvSpPr>
-          <p:cNvPr id="35" name="TextBox 34"/>
-          <p:cNvSpPr txBox="1"/>
-          <p:nvPr/>
-        </p:nvSpPr>
-        <p:spPr>
-          <a:xfrm>
-            <a:off x="5056632" y="5841187"/>
-            <a:ext cx="6492240" cy="212140"/>
-          </a:xfrm>
-          <a:prstGeom prst="rect">
-            <a:avLst/>
-          </a:prstGeom>
-          <a:noFill/>
-        </p:spPr>
-        <p:txBody>
-          <a:bodyPr wrap="square" lIns="0" rIns="0" tIns="0" bIns="0" anchor="t">
-            <a:spAutoFit/>
-          </a:bodyPr>
-          <a:lstStyle/>
-          <a:p>
-            <a:pPr algn="l">
-              <a:spcBef>
-                <a:spcPts val="0"/>
-              </a:spcBef>
-              <a:spcAft>
-                <a:spcPts val="300"/>
-              </a:spcAft>
-            </a:pPr>
-            <a:r>
-              <a:rPr sz="930" b="0" i="0">
+              <a:rPr sz="930" b="0" i="0" dirty="0">
                 <a:solidFill>
                   <a:srgbClr val="334155"/>
                 </a:solidFill>
@@ -4507,7 +4496,7 @@
 </file>
 
 <file path=ppt/slides/slide2.xml><?xml version="1.0" encoding="utf-8"?>
-<p:sld xmlns:a="http://schemas.openxmlformats.org/drawingml/2006/main" xmlns:p="http://schemas.openxmlformats.org/presentationml/2006/main" xmlns:r="http://schemas.openxmlformats.org/officeDocument/2006/relationships">
+<p:sld xmlns:a="http://schemas.openxmlformats.org/drawingml/2006/main" xmlns:r="http://schemas.openxmlformats.org/officeDocument/2006/relationships" xmlns:p="http://schemas.openxmlformats.org/presentationml/2006/main">
   <p:cSld>
     <p:bg>
       <p:bgPr>
@@ -4523,7 +4512,14 @@
         <p:cNvGrpSpPr/>
         <p:nvPr/>
       </p:nvGrpSpPr>
-      <p:grpSpPr/>
+      <p:grpSpPr>
+        <a:xfrm>
+          <a:off x="0" y="0"/>
+          <a:ext cx="0" cy="0"/>
+          <a:chOff x="0" y="0"/>
+          <a:chExt cx="0" cy="0"/>
+        </a:xfrm>
+      </p:grpSpPr>
       <p:sp>
         <p:nvSpPr>
           <p:cNvPr id="2" name="TextBox 1"/>
@@ -4541,7 +4537,7 @@
           <a:noFill/>
         </p:spPr>
         <p:txBody>
-          <a:bodyPr wrap="square" lIns="0" rIns="0" tIns="0" bIns="0" anchor="t">
+          <a:bodyPr wrap="square" lIns="0" tIns="0" rIns="0" bIns="0" anchor="t">
             <a:spAutoFit/>
           </a:bodyPr>
           <a:lstStyle/>
@@ -4583,7 +4579,7 @@
           <a:noFill/>
         </p:spPr>
         <p:txBody>
-          <a:bodyPr wrap="square" lIns="0" rIns="0" tIns="0" bIns="0" anchor="t">
+          <a:bodyPr wrap="square" lIns="0" tIns="0" rIns="0" bIns="0" anchor="t">
             <a:spAutoFit/>
           </a:bodyPr>
           <a:lstStyle/>
@@ -4625,7 +4621,7 @@
           <a:noFill/>
         </p:spPr>
         <p:txBody>
-          <a:bodyPr wrap="square" lIns="0" rIns="0" tIns="0" bIns="0" anchor="t">
+          <a:bodyPr wrap="square" lIns="0" tIns="0" rIns="0" bIns="0" anchor="t">
             <a:spAutoFit/>
           </a:bodyPr>
           <a:lstStyle/>
@@ -4702,7 +4698,7 @@
           <a:noFill/>
         </p:spPr>
         <p:txBody>
-          <a:bodyPr wrap="square" lIns="0" rIns="0" tIns="0" bIns="0" anchor="t">
+          <a:bodyPr wrap="square" lIns="0" tIns="0" rIns="0" bIns="0" anchor="t">
             <a:spAutoFit/>
           </a:bodyPr>
           <a:lstStyle/>
@@ -4769,6 +4765,7 @@
           <a:lstStyle/>
           <a:p>
             <a:pPr algn="ctr"/>
+            <a:endParaRPr/>
           </a:p>
         </p:txBody>
       </p:sp>
@@ -4789,7 +4786,7 @@
           <a:noFill/>
         </p:spPr>
         <p:txBody>
-          <a:bodyPr wrap="square" lIns="0" rIns="0" tIns="0" bIns="0" anchor="t">
+          <a:bodyPr wrap="square" lIns="0" tIns="0" rIns="0" bIns="0" anchor="t">
             <a:spAutoFit/>
           </a:bodyPr>
           <a:lstStyle/>
@@ -4866,7 +4863,7 @@
           <a:noFill/>
         </p:spPr>
         <p:txBody>
-          <a:bodyPr wrap="square" lIns="0" rIns="0" tIns="0" bIns="0" anchor="t">
+          <a:bodyPr wrap="square" lIns="0" tIns="0" rIns="0" bIns="0" anchor="t">
             <a:spAutoFit/>
           </a:bodyPr>
           <a:lstStyle/>
@@ -4908,7 +4905,7 @@
           <a:noFill/>
         </p:spPr>
         <p:txBody>
-          <a:bodyPr wrap="square" lIns="0" rIns="0" tIns="0" bIns="0" anchor="t">
+          <a:bodyPr wrap="square" lIns="0" tIns="0" rIns="0" bIns="0" anchor="t">
             <a:spAutoFit/>
           </a:bodyPr>
           <a:lstStyle/>
@@ -4950,7 +4947,7 @@
           <a:noFill/>
         </p:spPr>
         <p:txBody>
-          <a:bodyPr wrap="square" lIns="0" rIns="0" tIns="0" bIns="0" anchor="t">
+          <a:bodyPr wrap="square" lIns="0" tIns="0" rIns="0" bIns="0" anchor="t">
             <a:spAutoFit/>
           </a:bodyPr>
           <a:lstStyle/>
@@ -4992,7 +4989,7 @@
           <a:noFill/>
         </p:spPr>
         <p:txBody>
-          <a:bodyPr wrap="square" lIns="0" rIns="0" tIns="0" bIns="0" anchor="t">
+          <a:bodyPr wrap="square" lIns="0" tIns="0" rIns="0" bIns="0" anchor="t">
             <a:spAutoFit/>
           </a:bodyPr>
           <a:lstStyle/>
@@ -5025,7 +5022,7 @@
         </p:nvSpPr>
         <p:spPr>
           <a:xfrm>
-            <a:off x="640080" y="2854756"/>
+            <a:off x="640080" y="2782519"/>
             <a:ext cx="5303520" cy="345643"/>
           </a:xfrm>
           <a:prstGeom prst="rect">
@@ -5034,7 +5031,7 @@
           <a:noFill/>
         </p:spPr>
         <p:txBody>
-          <a:bodyPr wrap="square" lIns="0" rIns="0" tIns="0" bIns="0" anchor="t">
+          <a:bodyPr wrap="square" lIns="0" tIns="0" rIns="0" bIns="0" anchor="t">
             <a:spAutoFit/>
           </a:bodyPr>
           <a:lstStyle/>
@@ -5048,7 +5045,7 @@
               </a:spcAft>
             </a:pPr>
             <a:r>
-              <a:rPr sz="950" b="0" i="0">
+              <a:rPr sz="950" b="0" i="0" dirty="0">
                 <a:solidFill>
                   <a:srgbClr val="334155"/>
                 </a:solidFill>
@@ -5101,6 +5098,7 @@
           <a:lstStyle/>
           <a:p>
             <a:pPr algn="ctr"/>
+            <a:endParaRPr/>
           </a:p>
         </p:txBody>
       </p:sp>
@@ -5121,7 +5119,7 @@
           <a:noFill/>
         </p:spPr>
         <p:txBody>
-          <a:bodyPr wrap="square" lIns="0" rIns="0" tIns="0" bIns="0" anchor="t">
+          <a:bodyPr wrap="square" lIns="0" tIns="0" rIns="0" bIns="0" anchor="t">
             <a:spAutoFit/>
           </a:bodyPr>
           <a:lstStyle/>
@@ -5198,7 +5196,7 @@
           <a:noFill/>
         </p:spPr>
         <p:txBody>
-          <a:bodyPr wrap="square" lIns="0" rIns="0" tIns="0" bIns="0" anchor="t">
+          <a:bodyPr wrap="square" lIns="0" tIns="0" rIns="0" bIns="0" anchor="t">
             <a:spAutoFit/>
           </a:bodyPr>
           <a:lstStyle/>
@@ -5240,7 +5238,7 @@
           <a:noFill/>
         </p:spPr>
         <p:txBody>
-          <a:bodyPr wrap="square" lIns="0" rIns="0" tIns="0" bIns="0" anchor="t">
+          <a:bodyPr wrap="square" lIns="0" tIns="0" rIns="0" bIns="0" anchor="t">
             <a:spAutoFit/>
           </a:bodyPr>
           <a:lstStyle/>
@@ -5282,7 +5280,7 @@
           <a:noFill/>
         </p:spPr>
         <p:txBody>
-          <a:bodyPr wrap="square" lIns="0" rIns="0" tIns="0" bIns="0" anchor="t">
+          <a:bodyPr wrap="square" lIns="0" tIns="0" rIns="0" bIns="0" anchor="t">
             <a:spAutoFit/>
           </a:bodyPr>
           <a:lstStyle/>
@@ -5324,7 +5322,7 @@
           <a:noFill/>
         </p:spPr>
         <p:txBody>
-          <a:bodyPr wrap="square" lIns="0" rIns="0" tIns="0" bIns="0" anchor="t">
+          <a:bodyPr wrap="square" lIns="0" tIns="0" rIns="0" bIns="0" anchor="t">
             <a:spAutoFit/>
           </a:bodyPr>
           <a:lstStyle/>
@@ -5391,6 +5389,7 @@
           <a:lstStyle/>
           <a:p>
             <a:pPr algn="ctr"/>
+            <a:endParaRPr/>
           </a:p>
         </p:txBody>
       </p:sp>
@@ -5411,7 +5410,7 @@
           <a:noFill/>
         </p:spPr>
         <p:txBody>
-          <a:bodyPr wrap="square" lIns="0" rIns="0" tIns="0" bIns="0" anchor="t">
+          <a:bodyPr wrap="square" lIns="0" tIns="0" rIns="0" bIns="0" anchor="t">
             <a:spAutoFit/>
           </a:bodyPr>
           <a:lstStyle/>
@@ -5488,7 +5487,7 @@
           <a:noFill/>
         </p:spPr>
         <p:txBody>
-          <a:bodyPr wrap="square" lIns="0" rIns="0" tIns="0" bIns="0" anchor="t">
+          <a:bodyPr wrap="square" lIns="0" tIns="0" rIns="0" bIns="0" anchor="t">
             <a:spAutoFit/>
           </a:bodyPr>
           <a:lstStyle/>
@@ -5530,7 +5529,7 @@
           <a:noFill/>
         </p:spPr>
         <p:txBody>
-          <a:bodyPr wrap="square" lIns="0" rIns="0" tIns="0" bIns="0" anchor="t">
+          <a:bodyPr wrap="square" lIns="0" tIns="0" rIns="0" bIns="0" anchor="t">
             <a:spAutoFit/>
           </a:bodyPr>
           <a:lstStyle/>
@@ -5572,7 +5571,7 @@
           <a:noFill/>
         </p:spPr>
         <p:txBody>
-          <a:bodyPr wrap="square" lIns="0" rIns="0" tIns="0" bIns="0" anchor="t">
+          <a:bodyPr wrap="square" lIns="0" tIns="0" rIns="0" bIns="0" anchor="t">
             <a:spAutoFit/>
           </a:bodyPr>
           <a:lstStyle/>
@@ -5586,7 +5585,7 @@
               </a:spcAft>
             </a:pPr>
             <a:r>
-              <a:rPr sz="900" b="0" i="0">
+              <a:rPr sz="900" b="0" i="0" dirty="0">
                 <a:solidFill>
                   <a:srgbClr val="334155"/>
                 </a:solidFill>
@@ -5614,7 +5613,7 @@
           <a:noFill/>
         </p:spPr>
         <p:txBody>
-          <a:bodyPr wrap="square" lIns="0" rIns="0" tIns="0" bIns="0" anchor="t">
+          <a:bodyPr wrap="square" lIns="0" tIns="0" rIns="0" bIns="0" anchor="t">
             <a:spAutoFit/>
           </a:bodyPr>
           <a:lstStyle/>
@@ -5647,7 +5646,7 @@
         </p:nvSpPr>
         <p:spPr>
           <a:xfrm>
-            <a:off x="6382512" y="2708452"/>
+            <a:off x="6355080" y="2643530"/>
             <a:ext cx="5166360" cy="309067"/>
           </a:xfrm>
           <a:prstGeom prst="rect">
@@ -5656,7 +5655,7 @@
           <a:noFill/>
         </p:spPr>
         <p:txBody>
-          <a:bodyPr wrap="square" lIns="0" rIns="0" tIns="0" bIns="0" anchor="t">
+          <a:bodyPr wrap="square" lIns="0" tIns="0" rIns="0" bIns="0" anchor="t">
             <a:spAutoFit/>
           </a:bodyPr>
           <a:lstStyle/>
@@ -5670,7 +5669,7 @@
               </a:spcAft>
             </a:pPr>
             <a:r>
-              <a:rPr sz="900" b="0" i="0">
+              <a:rPr sz="900" b="0" i="0" dirty="0">
                 <a:solidFill>
                   <a:srgbClr val="334155"/>
                 </a:solidFill>
@@ -5723,6 +5722,7 @@
           <a:lstStyle/>
           <a:p>
             <a:pPr algn="ctr"/>
+            <a:endParaRPr/>
           </a:p>
         </p:txBody>
       </p:sp>
@@ -5743,7 +5743,7 @@
           <a:noFill/>
         </p:spPr>
         <p:txBody>
-          <a:bodyPr wrap="square" lIns="0" rIns="0" tIns="0" bIns="0" anchor="t">
+          <a:bodyPr wrap="square" lIns="0" tIns="0" rIns="0" bIns="0" anchor="t">
             <a:spAutoFit/>
           </a:bodyPr>
           <a:lstStyle/>
@@ -5820,7 +5820,7 @@
           <a:noFill/>
         </p:spPr>
         <p:txBody>
-          <a:bodyPr wrap="square" lIns="0" rIns="0" tIns="0" bIns="0" anchor="t">
+          <a:bodyPr wrap="square" lIns="0" tIns="0" rIns="0" bIns="0" anchor="t">
             <a:spAutoFit/>
           </a:bodyPr>
           <a:lstStyle/>
@@ -5862,7 +5862,7 @@
           <a:noFill/>
         </p:spPr>
         <p:txBody>
-          <a:bodyPr wrap="square" lIns="0" rIns="0" tIns="0" bIns="0" anchor="t">
+          <a:bodyPr wrap="square" lIns="0" tIns="0" rIns="0" bIns="0" anchor="t">
             <a:spAutoFit/>
           </a:bodyPr>
           <a:lstStyle/>
@@ -5904,7 +5904,7 @@
           <a:noFill/>
         </p:spPr>
         <p:txBody>
-          <a:bodyPr wrap="square" lIns="0" rIns="0" tIns="0" bIns="0" anchor="t">
+          <a:bodyPr wrap="square" lIns="0" tIns="0" rIns="0" bIns="0" anchor="t">
             <a:spAutoFit/>
           </a:bodyPr>
           <a:lstStyle/>
@@ -5971,6 +5971,7 @@
           <a:lstStyle/>
           <a:p>
             <a:pPr algn="ctr"/>
+            <a:endParaRPr/>
           </a:p>
         </p:txBody>
       </p:sp>
@@ -5991,7 +5992,7 @@
           <a:noFill/>
         </p:spPr>
         <p:txBody>
-          <a:bodyPr wrap="square" lIns="0" rIns="0" tIns="0" bIns="0" anchor="t">
+          <a:bodyPr wrap="square" lIns="0" tIns="0" rIns="0" bIns="0" anchor="t">
             <a:spAutoFit/>
           </a:bodyPr>
           <a:lstStyle/>
@@ -6059,8 +6060,8 @@
         </p:nvSpPr>
         <p:spPr>
           <a:xfrm>
-            <a:off x="6382512" y="5605272"/>
-            <a:ext cx="5166360" cy="571500"/>
+            <a:off x="6355080" y="5541264"/>
+            <a:ext cx="5166360" cy="453970"/>
           </a:xfrm>
           <a:prstGeom prst="rect">
             <a:avLst/>
@@ -6068,7 +6069,7 @@
           <a:noFill/>
         </p:spPr>
         <p:txBody>
-          <a:bodyPr wrap="square" lIns="0" rIns="0" tIns="0" bIns="0" anchor="t">
+          <a:bodyPr wrap="square" lIns="0" tIns="0" rIns="0" bIns="0" anchor="t">
             <a:spAutoFit/>
           </a:bodyPr>
           <a:lstStyle/>
@@ -6082,6 +6083,7 @@
               </a:defRPr>
             </a:pPr>
             <a:r>
+              <a:rPr dirty="0"/>
               <a:t>• MVP: https://rounds-ai-umber.vercel.app/</a:t>
             </a:r>
           </a:p>
@@ -6095,8 +6097,20 @@
               </a:defRPr>
             </a:pPr>
             <a:r>
-              <a:t>• Video Demo Walkthrough: [Insert 2–3 Minute Demo Video URL]</a:t>
-            </a:r>
+              <a:rPr dirty="0"/>
+              <a:t>• Video Demo Walkthrough: </a:t>
+            </a:r>
+            <a:r>
+              <a:rPr lang="en-IN" sz="950" dirty="0">
+                <a:solidFill>
+                  <a:srgbClr val="334155"/>
+                </a:solidFill>
+                <a:latin typeface="Calibri"/>
+                <a:hlinkClick r:id="rId2"/>
+              </a:rPr>
+              <a:t>https://youtu.be/Kia1C-a0QLk</a:t>
+            </a:r>
+            <a:endParaRPr dirty="0"/>
           </a:p>
           <a:p>
             <a:pPr>
@@ -6108,6 +6122,7 @@
               </a:defRPr>
             </a:pPr>
             <a:r>
+              <a:rPr dirty="0"/>
               <a:t>• Other Supporting Links (GitHub): https://github.com/santhoshh005/Rounds_AI</a:t>
             </a:r>
           </a:p>
@@ -6130,11 +6145,13 @@
           <a:noFill/>
         </p:spPr>
         <p:txBody>
-          <a:bodyPr wrap="square" lIns="0" rIns="0" tIns="0" bIns="0" anchor="t">
+          <a:bodyPr wrap="square" lIns="0" tIns="0" rIns="0" bIns="0" anchor="t">
             <a:spAutoFit/>
           </a:bodyPr>
           <a:lstStyle/>
-          <a:p/>
+          <a:p>
+            <a:endParaRPr/>
+          </a:p>
         </p:txBody>
       </p:sp>
     </p:spTree>
